--- a/marketing/pitch-deck/Intimacy-and-Sex-Therapy-Library-Pitch.pptx
+++ b/marketing/pitch-deck/Intimacy-and-Sex-Therapy-Library-Pitch.pptx
@@ -20,7 +20,7 @@
     <p:sldId id="268" r:id="rId19"/>
     <p:sldId id="269" r:id="rId20"/>
   </p:sldIdLst>
-  <p:sldSz cx="12191695" cy="6858000" type="screen4x3"/>
+  <p:sldSz cx="12192000" cy="6858000" type="screen16x9"/>
   <p:notesSz cx="6858000" cy="9144000"/>
   <p:defaultTextStyle>
     <a:defPPr>
@@ -3094,6 +3094,14 @@
 <file path=ppt/slides/slide1.xml><?xml version="1.0" encoding="utf-8"?>
 <p:sld xmlns:a="http://schemas.openxmlformats.org/drawingml/2006/main" xmlns:p="http://schemas.openxmlformats.org/presentationml/2006/main" xmlns:r="http://schemas.openxmlformats.org/officeDocument/2006/relationships">
   <p:cSld>
+    <p:bg>
+      <p:bgPr>
+        <a:solidFill>
+          <a:srgbClr val="F6EEE2"/>
+        </a:solidFill>
+        <a:effectLst/>
+      </p:bgPr>
+    </p:bg>
     <p:spTree>
       <p:nvGrpSpPr>
         <p:cNvPr id="1" name=""/>
@@ -3103,50 +3111,7 @@
       <p:grpSpPr/>
       <p:sp>
         <p:nvSpPr>
-          <p:cNvPr id="2" name="Rectangle 1"/>
-          <p:cNvSpPr/>
-          <p:nvPr/>
-        </p:nvSpPr>
-        <p:spPr>
-          <a:xfrm>
-            <a:off x="0" y="0"/>
-            <a:ext cx="12191695" cy="6858000"/>
-          </a:xfrm>
-          <a:prstGeom prst="rect">
-            <a:avLst/>
-          </a:prstGeom>
-          <a:solidFill>
-            <a:srgbClr val="F6EEE2"/>
-          </a:solidFill>
-          <a:ln>
-            <a:noFill/>
-          </a:ln>
-        </p:spPr>
-        <p:style>
-          <a:lnRef idx="1">
-            <a:schemeClr val="accent1"/>
-          </a:lnRef>
-          <a:fillRef idx="3">
-            <a:schemeClr val="accent1"/>
-          </a:fillRef>
-          <a:effectRef idx="2">
-            <a:schemeClr val="accent1"/>
-          </a:effectRef>
-          <a:fontRef idx="minor">
-            <a:schemeClr val="lt1"/>
-          </a:fontRef>
-        </p:style>
-        <p:txBody>
-          <a:bodyPr rtlCol="0" anchor="ctr"/>
-          <a:lstStyle/>
-          <a:p>
-            <a:pPr algn="ctr"/>
-          </a:p>
-        </p:txBody>
-      </p:sp>
-      <p:sp>
-        <p:nvSpPr>
-          <p:cNvPr id="3" name="TextBox 2"/>
+          <p:cNvPr id="2" name="TextBox 1"/>
           <p:cNvSpPr txBox="1"/>
           <p:nvPr/>
         </p:nvSpPr>
@@ -3181,7 +3146,7 @@
       </p:sp>
       <p:sp>
         <p:nvSpPr>
-          <p:cNvPr id="4" name="TextBox 3"/>
+          <p:cNvPr id="3" name="TextBox 2"/>
           <p:cNvSpPr txBox="1"/>
           <p:nvPr/>
         </p:nvSpPr>
@@ -3216,7 +3181,7 @@
       </p:sp>
       <p:sp>
         <p:nvSpPr>
-          <p:cNvPr id="5" name="TextBox 4"/>
+          <p:cNvPr id="4" name="TextBox 3"/>
           <p:cNvSpPr txBox="1"/>
           <p:nvPr/>
         </p:nvSpPr>
@@ -3275,7 +3240,7 @@
       </p:sp>
       <p:sp>
         <p:nvSpPr>
-          <p:cNvPr id="6" name="TextBox 5"/>
+          <p:cNvPr id="5" name="TextBox 4"/>
           <p:cNvSpPr txBox="1"/>
           <p:nvPr/>
         </p:nvSpPr>
@@ -3310,7 +3275,7 @@
       </p:sp>
       <p:sp>
         <p:nvSpPr>
-          <p:cNvPr id="7" name="TextBox 6"/>
+          <p:cNvPr id="6" name="TextBox 5"/>
           <p:cNvSpPr txBox="1"/>
           <p:nvPr/>
         </p:nvSpPr>
@@ -3345,7 +3310,7 @@
       </p:sp>
       <p:sp>
         <p:nvSpPr>
-          <p:cNvPr id="8" name="TextBox 7"/>
+          <p:cNvPr id="7" name="TextBox 6"/>
           <p:cNvSpPr txBox="1"/>
           <p:nvPr/>
         </p:nvSpPr>
@@ -3389,6 +3354,14 @@
 <file path=ppt/slides/slide10.xml><?xml version="1.0" encoding="utf-8"?>
 <p:sld xmlns:a="http://schemas.openxmlformats.org/drawingml/2006/main" xmlns:p="http://schemas.openxmlformats.org/presentationml/2006/main" xmlns:r="http://schemas.openxmlformats.org/officeDocument/2006/relationships">
   <p:cSld>
+    <p:bg>
+      <p:bgPr>
+        <a:solidFill>
+          <a:srgbClr val="F6EEE2"/>
+        </a:solidFill>
+        <a:effectLst/>
+      </p:bgPr>
+    </p:bg>
     <p:spTree>
       <p:nvGrpSpPr>
         <p:cNvPr id="1" name=""/>
@@ -3404,49 +3377,6 @@
         </p:nvSpPr>
         <p:spPr>
           <a:xfrm>
-            <a:off x="0" y="0"/>
-            <a:ext cx="12191695" cy="6858000"/>
-          </a:xfrm>
-          <a:prstGeom prst="rect">
-            <a:avLst/>
-          </a:prstGeom>
-          <a:solidFill>
-            <a:srgbClr val="F6EEE2"/>
-          </a:solidFill>
-          <a:ln>
-            <a:noFill/>
-          </a:ln>
-        </p:spPr>
-        <p:style>
-          <a:lnRef idx="1">
-            <a:schemeClr val="accent1"/>
-          </a:lnRef>
-          <a:fillRef idx="3">
-            <a:schemeClr val="accent1"/>
-          </a:fillRef>
-          <a:effectRef idx="2">
-            <a:schemeClr val="accent1"/>
-          </a:effectRef>
-          <a:fontRef idx="minor">
-            <a:schemeClr val="lt1"/>
-          </a:fontRef>
-        </p:style>
-        <p:txBody>
-          <a:bodyPr rtlCol="0" anchor="ctr"/>
-          <a:lstStyle/>
-          <a:p>
-            <a:pPr algn="ctr"/>
-          </a:p>
-        </p:txBody>
-      </p:sp>
-      <p:sp>
-        <p:nvSpPr>
-          <p:cNvPr id="3" name="Rectangle 2"/>
-          <p:cNvSpPr/>
-          <p:nvPr/>
-        </p:nvSpPr>
-        <p:spPr>
-          <a:xfrm>
             <a:off x="548640" y="548640"/>
             <a:ext cx="548640" cy="73152"/>
           </a:xfrm>
@@ -3460,20 +3390,6 @@
             <a:noFill/>
           </a:ln>
         </p:spPr>
-        <p:style>
-          <a:lnRef idx="1">
-            <a:schemeClr val="accent1"/>
-          </a:lnRef>
-          <a:fillRef idx="3">
-            <a:schemeClr val="accent1"/>
-          </a:fillRef>
-          <a:effectRef idx="2">
-            <a:schemeClr val="accent1"/>
-          </a:effectRef>
-          <a:fontRef idx="minor">
-            <a:schemeClr val="lt1"/>
-          </a:fontRef>
-        </p:style>
         <p:txBody>
           <a:bodyPr rtlCol="0" anchor="ctr"/>
           <a:lstStyle/>
@@ -3484,7 +3400,7 @@
       </p:sp>
       <p:sp>
         <p:nvSpPr>
-          <p:cNvPr id="4" name="TextBox 3"/>
+          <p:cNvPr id="3" name="TextBox 2"/>
           <p:cNvSpPr txBox="1"/>
           <p:nvPr/>
         </p:nvSpPr>
@@ -3519,7 +3435,7 @@
       </p:sp>
       <p:sp>
         <p:nvSpPr>
-          <p:cNvPr id="5" name="TextBox 4"/>
+          <p:cNvPr id="4" name="TextBox 3"/>
           <p:cNvSpPr txBox="1"/>
           <p:nvPr/>
         </p:nvSpPr>
@@ -3554,7 +3470,7 @@
       </p:sp>
       <p:sp>
         <p:nvSpPr>
-          <p:cNvPr id="6" name="TextBox 5"/>
+          <p:cNvPr id="5" name="TextBox 4"/>
           <p:cNvSpPr txBox="1"/>
           <p:nvPr/>
         </p:nvSpPr>
@@ -3589,7 +3505,7 @@
       </p:sp>
       <p:sp>
         <p:nvSpPr>
-          <p:cNvPr id="7" name="TextBox 6"/>
+          <p:cNvPr id="6" name="TextBox 5"/>
           <p:cNvSpPr txBox="1"/>
           <p:nvPr/>
         </p:nvSpPr>
@@ -3624,7 +3540,7 @@
       </p:sp>
       <p:sp>
         <p:nvSpPr>
-          <p:cNvPr id="8" name="TextBox 7"/>
+          <p:cNvPr id="7" name="TextBox 6"/>
           <p:cNvSpPr txBox="1"/>
           <p:nvPr/>
         </p:nvSpPr>
@@ -3659,7 +3575,7 @@
       </p:sp>
       <p:sp>
         <p:nvSpPr>
-          <p:cNvPr id="9" name="TextBox 8"/>
+          <p:cNvPr id="8" name="TextBox 7"/>
           <p:cNvSpPr txBox="1"/>
           <p:nvPr/>
         </p:nvSpPr>
@@ -3694,7 +3610,7 @@
       </p:sp>
       <p:sp>
         <p:nvSpPr>
-          <p:cNvPr id="10" name="TextBox 9"/>
+          <p:cNvPr id="9" name="TextBox 8"/>
           <p:cNvSpPr txBox="1"/>
           <p:nvPr/>
         </p:nvSpPr>
@@ -3729,7 +3645,7 @@
       </p:sp>
       <p:sp>
         <p:nvSpPr>
-          <p:cNvPr id="11" name="TextBox 10"/>
+          <p:cNvPr id="10" name="TextBox 9"/>
           <p:cNvSpPr txBox="1"/>
           <p:nvPr/>
         </p:nvSpPr>
@@ -3764,7 +3680,7 @@
       </p:sp>
       <p:sp>
         <p:nvSpPr>
-          <p:cNvPr id="12" name="TextBox 11"/>
+          <p:cNvPr id="11" name="TextBox 10"/>
           <p:cNvSpPr txBox="1"/>
           <p:nvPr/>
         </p:nvSpPr>
@@ -3799,7 +3715,7 @@
       </p:sp>
       <p:sp>
         <p:nvSpPr>
-          <p:cNvPr id="13" name="TextBox 12"/>
+          <p:cNvPr id="12" name="TextBox 11"/>
           <p:cNvSpPr txBox="1"/>
           <p:nvPr/>
         </p:nvSpPr>
@@ -3834,7 +3750,7 @@
       </p:sp>
       <p:sp>
         <p:nvSpPr>
-          <p:cNvPr id="14" name="TextBox 13"/>
+          <p:cNvPr id="13" name="TextBox 12"/>
           <p:cNvSpPr txBox="1"/>
           <p:nvPr/>
         </p:nvSpPr>
@@ -3869,7 +3785,7 @@
       </p:sp>
       <p:sp>
         <p:nvSpPr>
-          <p:cNvPr id="15" name="TextBox 14"/>
+          <p:cNvPr id="14" name="TextBox 13"/>
           <p:cNvSpPr txBox="1"/>
           <p:nvPr/>
         </p:nvSpPr>
@@ -3904,7 +3820,7 @@
       </p:sp>
       <p:sp>
         <p:nvSpPr>
-          <p:cNvPr id="16" name="TextBox 15"/>
+          <p:cNvPr id="15" name="TextBox 14"/>
           <p:cNvSpPr txBox="1"/>
           <p:nvPr/>
         </p:nvSpPr>
@@ -3939,7 +3855,7 @@
       </p:sp>
       <p:sp>
         <p:nvSpPr>
-          <p:cNvPr id="17" name="TextBox 16"/>
+          <p:cNvPr id="16" name="TextBox 15"/>
           <p:cNvSpPr txBox="1"/>
           <p:nvPr/>
         </p:nvSpPr>
@@ -3974,7 +3890,7 @@
       </p:sp>
       <p:sp>
         <p:nvSpPr>
-          <p:cNvPr id="18" name="TextBox 17"/>
+          <p:cNvPr id="17" name="TextBox 16"/>
           <p:cNvSpPr txBox="1"/>
           <p:nvPr/>
         </p:nvSpPr>
@@ -4009,7 +3925,7 @@
       </p:sp>
       <p:sp>
         <p:nvSpPr>
-          <p:cNvPr id="19" name="TextBox 18"/>
+          <p:cNvPr id="18" name="TextBox 17"/>
           <p:cNvSpPr txBox="1"/>
           <p:nvPr/>
         </p:nvSpPr>
@@ -4044,7 +3960,7 @@
       </p:sp>
       <p:sp>
         <p:nvSpPr>
-          <p:cNvPr id="20" name="TextBox 19"/>
+          <p:cNvPr id="19" name="TextBox 18"/>
           <p:cNvSpPr txBox="1"/>
           <p:nvPr/>
         </p:nvSpPr>
@@ -4079,7 +3995,7 @@
       </p:sp>
       <p:sp>
         <p:nvSpPr>
-          <p:cNvPr id="21" name="TextBox 20"/>
+          <p:cNvPr id="20" name="TextBox 19"/>
           <p:cNvSpPr txBox="1"/>
           <p:nvPr/>
         </p:nvSpPr>
@@ -4114,7 +4030,7 @@
       </p:sp>
       <p:sp>
         <p:nvSpPr>
-          <p:cNvPr id="22" name="TextBox 21"/>
+          <p:cNvPr id="21" name="TextBox 20"/>
           <p:cNvSpPr txBox="1"/>
           <p:nvPr/>
         </p:nvSpPr>
@@ -4149,7 +4065,7 @@
       </p:sp>
       <p:sp>
         <p:nvSpPr>
-          <p:cNvPr id="23" name="TextBox 22"/>
+          <p:cNvPr id="22" name="TextBox 21"/>
           <p:cNvSpPr txBox="1"/>
           <p:nvPr/>
         </p:nvSpPr>
@@ -4184,7 +4100,7 @@
       </p:sp>
       <p:sp>
         <p:nvSpPr>
-          <p:cNvPr id="24" name="TextBox 23"/>
+          <p:cNvPr id="23" name="TextBox 22"/>
           <p:cNvSpPr txBox="1"/>
           <p:nvPr/>
         </p:nvSpPr>
@@ -4219,7 +4135,7 @@
       </p:sp>
       <p:sp>
         <p:nvSpPr>
-          <p:cNvPr id="25" name="TextBox 24"/>
+          <p:cNvPr id="24" name="TextBox 23"/>
           <p:cNvSpPr txBox="1"/>
           <p:nvPr/>
         </p:nvSpPr>
@@ -4254,7 +4170,7 @@
       </p:sp>
       <p:sp>
         <p:nvSpPr>
-          <p:cNvPr id="26" name="TextBox 25"/>
+          <p:cNvPr id="25" name="TextBox 24"/>
           <p:cNvSpPr txBox="1"/>
           <p:nvPr/>
         </p:nvSpPr>
@@ -4289,7 +4205,7 @@
       </p:sp>
       <p:sp>
         <p:nvSpPr>
-          <p:cNvPr id="27" name="TextBox 26"/>
+          <p:cNvPr id="26" name="TextBox 25"/>
           <p:cNvSpPr txBox="1"/>
           <p:nvPr/>
         </p:nvSpPr>
@@ -4324,7 +4240,7 @@
       </p:sp>
       <p:sp>
         <p:nvSpPr>
-          <p:cNvPr id="28" name="TextBox 27"/>
+          <p:cNvPr id="27" name="TextBox 26"/>
           <p:cNvSpPr txBox="1"/>
           <p:nvPr/>
         </p:nvSpPr>
@@ -4368,6 +4284,14 @@
 <file path=ppt/slides/slide11.xml><?xml version="1.0" encoding="utf-8"?>
 <p:sld xmlns:a="http://schemas.openxmlformats.org/drawingml/2006/main" xmlns:p="http://schemas.openxmlformats.org/presentationml/2006/main" xmlns:r="http://schemas.openxmlformats.org/officeDocument/2006/relationships">
   <p:cSld>
+    <p:bg>
+      <p:bgPr>
+        <a:solidFill>
+          <a:srgbClr val="F6EEE2"/>
+        </a:solidFill>
+        <a:effectLst/>
+      </p:bgPr>
+    </p:bg>
     <p:spTree>
       <p:nvGrpSpPr>
         <p:cNvPr id="1" name=""/>
@@ -4383,49 +4307,6 @@
         </p:nvSpPr>
         <p:spPr>
           <a:xfrm>
-            <a:off x="0" y="0"/>
-            <a:ext cx="12191695" cy="6858000"/>
-          </a:xfrm>
-          <a:prstGeom prst="rect">
-            <a:avLst/>
-          </a:prstGeom>
-          <a:solidFill>
-            <a:srgbClr val="F6EEE2"/>
-          </a:solidFill>
-          <a:ln>
-            <a:noFill/>
-          </a:ln>
-        </p:spPr>
-        <p:style>
-          <a:lnRef idx="1">
-            <a:schemeClr val="accent1"/>
-          </a:lnRef>
-          <a:fillRef idx="3">
-            <a:schemeClr val="accent1"/>
-          </a:fillRef>
-          <a:effectRef idx="2">
-            <a:schemeClr val="accent1"/>
-          </a:effectRef>
-          <a:fontRef idx="minor">
-            <a:schemeClr val="lt1"/>
-          </a:fontRef>
-        </p:style>
-        <p:txBody>
-          <a:bodyPr rtlCol="0" anchor="ctr"/>
-          <a:lstStyle/>
-          <a:p>
-            <a:pPr algn="ctr"/>
-          </a:p>
-        </p:txBody>
-      </p:sp>
-      <p:sp>
-        <p:nvSpPr>
-          <p:cNvPr id="3" name="Rectangle 2"/>
-          <p:cNvSpPr/>
-          <p:nvPr/>
-        </p:nvSpPr>
-        <p:spPr>
-          <a:xfrm>
             <a:off x="548640" y="548640"/>
             <a:ext cx="548640" cy="73152"/>
           </a:xfrm>
@@ -4439,20 +4320,6 @@
             <a:noFill/>
           </a:ln>
         </p:spPr>
-        <p:style>
-          <a:lnRef idx="1">
-            <a:schemeClr val="accent1"/>
-          </a:lnRef>
-          <a:fillRef idx="3">
-            <a:schemeClr val="accent1"/>
-          </a:fillRef>
-          <a:effectRef idx="2">
-            <a:schemeClr val="accent1"/>
-          </a:effectRef>
-          <a:fontRef idx="minor">
-            <a:schemeClr val="lt1"/>
-          </a:fontRef>
-        </p:style>
         <p:txBody>
           <a:bodyPr rtlCol="0" anchor="ctr"/>
           <a:lstStyle/>
@@ -4463,7 +4330,7 @@
       </p:sp>
       <p:sp>
         <p:nvSpPr>
-          <p:cNvPr id="4" name="TextBox 3"/>
+          <p:cNvPr id="3" name="TextBox 2"/>
           <p:cNvSpPr txBox="1"/>
           <p:nvPr/>
         </p:nvSpPr>
@@ -4498,7 +4365,7 @@
       </p:sp>
       <p:sp>
         <p:nvSpPr>
-          <p:cNvPr id="5" name="TextBox 4"/>
+          <p:cNvPr id="4" name="TextBox 3"/>
           <p:cNvSpPr txBox="1"/>
           <p:nvPr/>
         </p:nvSpPr>
@@ -4533,7 +4400,7 @@
       </p:sp>
       <p:sp>
         <p:nvSpPr>
-          <p:cNvPr id="6" name="Rounded Rectangle 5"/>
+          <p:cNvPr id="5" name="Rounded Rectangle 4"/>
           <p:cNvSpPr/>
           <p:nvPr/>
         </p:nvSpPr>
@@ -4554,20 +4421,6 @@
             <a:noFill/>
           </a:ln>
         </p:spPr>
-        <p:style>
-          <a:lnRef idx="1">
-            <a:schemeClr val="accent1"/>
-          </a:lnRef>
-          <a:fillRef idx="3">
-            <a:schemeClr val="accent1"/>
-          </a:fillRef>
-          <a:effectRef idx="2">
-            <a:schemeClr val="accent1"/>
-          </a:effectRef>
-          <a:fontRef idx="minor">
-            <a:schemeClr val="lt1"/>
-          </a:fontRef>
-        </p:style>
         <p:txBody>
           <a:bodyPr rtlCol="0" anchor="ctr"/>
           <a:lstStyle/>
@@ -4578,7 +4431,7 @@
       </p:sp>
       <p:sp>
         <p:nvSpPr>
-          <p:cNvPr id="7" name="Rounded Rectangle 6"/>
+          <p:cNvPr id="6" name="Rounded Rectangle 5"/>
           <p:cNvSpPr/>
           <p:nvPr/>
         </p:nvSpPr>
@@ -4599,20 +4452,6 @@
             <a:noFill/>
           </a:ln>
         </p:spPr>
-        <p:style>
-          <a:lnRef idx="1">
-            <a:schemeClr val="accent1"/>
-          </a:lnRef>
-          <a:fillRef idx="3">
-            <a:schemeClr val="accent1"/>
-          </a:fillRef>
-          <a:effectRef idx="2">
-            <a:schemeClr val="accent1"/>
-          </a:effectRef>
-          <a:fontRef idx="minor">
-            <a:schemeClr val="lt1"/>
-          </a:fontRef>
-        </p:style>
         <p:txBody>
           <a:bodyPr rtlCol="0" anchor="ctr"/>
           <a:lstStyle/>
@@ -4623,7 +4462,7 @@
       </p:sp>
       <p:sp>
         <p:nvSpPr>
-          <p:cNvPr id="8" name="TextBox 7"/>
+          <p:cNvPr id="7" name="TextBox 6"/>
           <p:cNvSpPr txBox="1"/>
           <p:nvPr/>
         </p:nvSpPr>
@@ -4658,7 +4497,7 @@
       </p:sp>
       <p:sp>
         <p:nvSpPr>
-          <p:cNvPr id="9" name="TextBox 8"/>
+          <p:cNvPr id="8" name="TextBox 7"/>
           <p:cNvSpPr txBox="1"/>
           <p:nvPr/>
         </p:nvSpPr>
@@ -4693,7 +4532,7 @@
       </p:sp>
       <p:sp>
         <p:nvSpPr>
-          <p:cNvPr id="10" name="TextBox 9"/>
+          <p:cNvPr id="9" name="TextBox 8"/>
           <p:cNvSpPr txBox="1"/>
           <p:nvPr/>
         </p:nvSpPr>
@@ -4752,7 +4591,7 @@
       </p:sp>
       <p:sp>
         <p:nvSpPr>
-          <p:cNvPr id="11" name="Rounded Rectangle 10"/>
+          <p:cNvPr id="10" name="Rounded Rectangle 9"/>
           <p:cNvSpPr/>
           <p:nvPr/>
         </p:nvSpPr>
@@ -4773,20 +4612,6 @@
             <a:noFill/>
           </a:ln>
         </p:spPr>
-        <p:style>
-          <a:lnRef idx="1">
-            <a:schemeClr val="accent1"/>
-          </a:lnRef>
-          <a:fillRef idx="3">
-            <a:schemeClr val="accent1"/>
-          </a:fillRef>
-          <a:effectRef idx="2">
-            <a:schemeClr val="accent1"/>
-          </a:effectRef>
-          <a:fontRef idx="minor">
-            <a:schemeClr val="lt1"/>
-          </a:fontRef>
-        </p:style>
         <p:txBody>
           <a:bodyPr rtlCol="0" anchor="ctr"/>
           <a:lstStyle/>
@@ -4797,7 +4622,7 @@
       </p:sp>
       <p:sp>
         <p:nvSpPr>
-          <p:cNvPr id="12" name="Rounded Rectangle 11"/>
+          <p:cNvPr id="11" name="Rounded Rectangle 10"/>
           <p:cNvSpPr/>
           <p:nvPr/>
         </p:nvSpPr>
@@ -4818,20 +4643,6 @@
             <a:noFill/>
           </a:ln>
         </p:spPr>
-        <p:style>
-          <a:lnRef idx="1">
-            <a:schemeClr val="accent1"/>
-          </a:lnRef>
-          <a:fillRef idx="3">
-            <a:schemeClr val="accent1"/>
-          </a:fillRef>
-          <a:effectRef idx="2">
-            <a:schemeClr val="accent1"/>
-          </a:effectRef>
-          <a:fontRef idx="minor">
-            <a:schemeClr val="lt1"/>
-          </a:fontRef>
-        </p:style>
         <p:txBody>
           <a:bodyPr rtlCol="0" anchor="ctr"/>
           <a:lstStyle/>
@@ -4842,7 +4653,7 @@
       </p:sp>
       <p:sp>
         <p:nvSpPr>
-          <p:cNvPr id="13" name="TextBox 12"/>
+          <p:cNvPr id="12" name="TextBox 11"/>
           <p:cNvSpPr txBox="1"/>
           <p:nvPr/>
         </p:nvSpPr>
@@ -4877,7 +4688,7 @@
       </p:sp>
       <p:sp>
         <p:nvSpPr>
-          <p:cNvPr id="14" name="TextBox 13"/>
+          <p:cNvPr id="13" name="TextBox 12"/>
           <p:cNvSpPr txBox="1"/>
           <p:nvPr/>
         </p:nvSpPr>
@@ -4912,7 +4723,7 @@
       </p:sp>
       <p:sp>
         <p:nvSpPr>
-          <p:cNvPr id="15" name="TextBox 14"/>
+          <p:cNvPr id="14" name="TextBox 13"/>
           <p:cNvSpPr txBox="1"/>
           <p:nvPr/>
         </p:nvSpPr>
@@ -4971,7 +4782,7 @@
       </p:sp>
       <p:sp>
         <p:nvSpPr>
-          <p:cNvPr id="16" name="Rounded Rectangle 15"/>
+          <p:cNvPr id="15" name="Rounded Rectangle 14"/>
           <p:cNvSpPr/>
           <p:nvPr/>
         </p:nvSpPr>
@@ -4992,20 +4803,6 @@
             <a:noFill/>
           </a:ln>
         </p:spPr>
-        <p:style>
-          <a:lnRef idx="1">
-            <a:schemeClr val="accent1"/>
-          </a:lnRef>
-          <a:fillRef idx="3">
-            <a:schemeClr val="accent1"/>
-          </a:fillRef>
-          <a:effectRef idx="2">
-            <a:schemeClr val="accent1"/>
-          </a:effectRef>
-          <a:fontRef idx="minor">
-            <a:schemeClr val="lt1"/>
-          </a:fontRef>
-        </p:style>
         <p:txBody>
           <a:bodyPr rtlCol="0" anchor="ctr"/>
           <a:lstStyle/>
@@ -5016,7 +4813,7 @@
       </p:sp>
       <p:sp>
         <p:nvSpPr>
-          <p:cNvPr id="17" name="Rounded Rectangle 16"/>
+          <p:cNvPr id="16" name="Rounded Rectangle 15"/>
           <p:cNvSpPr/>
           <p:nvPr/>
         </p:nvSpPr>
@@ -5037,20 +4834,6 @@
             <a:noFill/>
           </a:ln>
         </p:spPr>
-        <p:style>
-          <a:lnRef idx="1">
-            <a:schemeClr val="accent1"/>
-          </a:lnRef>
-          <a:fillRef idx="3">
-            <a:schemeClr val="accent1"/>
-          </a:fillRef>
-          <a:effectRef idx="2">
-            <a:schemeClr val="accent1"/>
-          </a:effectRef>
-          <a:fontRef idx="minor">
-            <a:schemeClr val="lt1"/>
-          </a:fontRef>
-        </p:style>
         <p:txBody>
           <a:bodyPr rtlCol="0" anchor="ctr"/>
           <a:lstStyle/>
@@ -5061,7 +4844,7 @@
       </p:sp>
       <p:sp>
         <p:nvSpPr>
-          <p:cNvPr id="18" name="TextBox 17"/>
+          <p:cNvPr id="17" name="TextBox 16"/>
           <p:cNvSpPr txBox="1"/>
           <p:nvPr/>
         </p:nvSpPr>
@@ -5096,7 +4879,7 @@
       </p:sp>
       <p:sp>
         <p:nvSpPr>
-          <p:cNvPr id="19" name="TextBox 18"/>
+          <p:cNvPr id="18" name="TextBox 17"/>
           <p:cNvSpPr txBox="1"/>
           <p:nvPr/>
         </p:nvSpPr>
@@ -5131,7 +4914,7 @@
       </p:sp>
       <p:sp>
         <p:nvSpPr>
-          <p:cNvPr id="20" name="TextBox 19"/>
+          <p:cNvPr id="19" name="TextBox 18"/>
           <p:cNvSpPr txBox="1"/>
           <p:nvPr/>
         </p:nvSpPr>
@@ -5190,7 +4973,7 @@
       </p:sp>
       <p:sp>
         <p:nvSpPr>
-          <p:cNvPr id="21" name="TextBox 20"/>
+          <p:cNvPr id="20" name="TextBox 19"/>
           <p:cNvSpPr txBox="1"/>
           <p:nvPr/>
         </p:nvSpPr>
@@ -5225,7 +5008,7 @@
       </p:sp>
       <p:sp>
         <p:nvSpPr>
-          <p:cNvPr id="22" name="TextBox 21"/>
+          <p:cNvPr id="21" name="TextBox 20"/>
           <p:cNvSpPr txBox="1"/>
           <p:nvPr/>
         </p:nvSpPr>
@@ -5269,6 +5052,14 @@
 <file path=ppt/slides/slide12.xml><?xml version="1.0" encoding="utf-8"?>
 <p:sld xmlns:a="http://schemas.openxmlformats.org/drawingml/2006/main" xmlns:p="http://schemas.openxmlformats.org/presentationml/2006/main" xmlns:r="http://schemas.openxmlformats.org/officeDocument/2006/relationships">
   <p:cSld>
+    <p:bg>
+      <p:bgPr>
+        <a:solidFill>
+          <a:srgbClr val="F6EEE2"/>
+        </a:solidFill>
+        <a:effectLst/>
+      </p:bgPr>
+    </p:bg>
     <p:spTree>
       <p:nvGrpSpPr>
         <p:cNvPr id="1" name=""/>
@@ -5284,49 +5075,6 @@
         </p:nvSpPr>
         <p:spPr>
           <a:xfrm>
-            <a:off x="0" y="0"/>
-            <a:ext cx="12191695" cy="6858000"/>
-          </a:xfrm>
-          <a:prstGeom prst="rect">
-            <a:avLst/>
-          </a:prstGeom>
-          <a:solidFill>
-            <a:srgbClr val="F6EEE2"/>
-          </a:solidFill>
-          <a:ln>
-            <a:noFill/>
-          </a:ln>
-        </p:spPr>
-        <p:style>
-          <a:lnRef idx="1">
-            <a:schemeClr val="accent1"/>
-          </a:lnRef>
-          <a:fillRef idx="3">
-            <a:schemeClr val="accent1"/>
-          </a:fillRef>
-          <a:effectRef idx="2">
-            <a:schemeClr val="accent1"/>
-          </a:effectRef>
-          <a:fontRef idx="minor">
-            <a:schemeClr val="lt1"/>
-          </a:fontRef>
-        </p:style>
-        <p:txBody>
-          <a:bodyPr rtlCol="0" anchor="ctr"/>
-          <a:lstStyle/>
-          <a:p>
-            <a:pPr algn="ctr"/>
-          </a:p>
-        </p:txBody>
-      </p:sp>
-      <p:sp>
-        <p:nvSpPr>
-          <p:cNvPr id="3" name="Rectangle 2"/>
-          <p:cNvSpPr/>
-          <p:nvPr/>
-        </p:nvSpPr>
-        <p:spPr>
-          <a:xfrm>
             <a:off x="548640" y="548640"/>
             <a:ext cx="548640" cy="73152"/>
           </a:xfrm>
@@ -5340,20 +5088,6 @@
             <a:noFill/>
           </a:ln>
         </p:spPr>
-        <p:style>
-          <a:lnRef idx="1">
-            <a:schemeClr val="accent1"/>
-          </a:lnRef>
-          <a:fillRef idx="3">
-            <a:schemeClr val="accent1"/>
-          </a:fillRef>
-          <a:effectRef idx="2">
-            <a:schemeClr val="accent1"/>
-          </a:effectRef>
-          <a:fontRef idx="minor">
-            <a:schemeClr val="lt1"/>
-          </a:fontRef>
-        </p:style>
         <p:txBody>
           <a:bodyPr rtlCol="0" anchor="ctr"/>
           <a:lstStyle/>
@@ -5364,7 +5098,7 @@
       </p:sp>
       <p:sp>
         <p:nvSpPr>
-          <p:cNvPr id="4" name="TextBox 3"/>
+          <p:cNvPr id="3" name="TextBox 2"/>
           <p:cNvSpPr txBox="1"/>
           <p:nvPr/>
         </p:nvSpPr>
@@ -5399,7 +5133,7 @@
       </p:sp>
       <p:sp>
         <p:nvSpPr>
-          <p:cNvPr id="5" name="TextBox 4"/>
+          <p:cNvPr id="4" name="TextBox 3"/>
           <p:cNvSpPr txBox="1"/>
           <p:nvPr/>
         </p:nvSpPr>
@@ -5434,7 +5168,7 @@
       </p:sp>
       <p:sp>
         <p:nvSpPr>
-          <p:cNvPr id="6" name="Rounded Rectangle 5"/>
+          <p:cNvPr id="5" name="Rounded Rectangle 4"/>
           <p:cNvSpPr/>
           <p:nvPr/>
         </p:nvSpPr>
@@ -5455,20 +5189,6 @@
             <a:noFill/>
           </a:ln>
         </p:spPr>
-        <p:style>
-          <a:lnRef idx="1">
-            <a:schemeClr val="accent1"/>
-          </a:lnRef>
-          <a:fillRef idx="3">
-            <a:schemeClr val="accent1"/>
-          </a:fillRef>
-          <a:effectRef idx="2">
-            <a:schemeClr val="accent1"/>
-          </a:effectRef>
-          <a:fontRef idx="minor">
-            <a:schemeClr val="lt1"/>
-          </a:fontRef>
-        </p:style>
         <p:txBody>
           <a:bodyPr rtlCol="0" anchor="ctr"/>
           <a:lstStyle/>
@@ -5479,7 +5199,7 @@
       </p:sp>
       <p:sp>
         <p:nvSpPr>
-          <p:cNvPr id="7" name="Rounded Rectangle 6"/>
+          <p:cNvPr id="6" name="Rounded Rectangle 5"/>
           <p:cNvSpPr/>
           <p:nvPr/>
         </p:nvSpPr>
@@ -5500,20 +5220,6 @@
             <a:noFill/>
           </a:ln>
         </p:spPr>
-        <p:style>
-          <a:lnRef idx="1">
-            <a:schemeClr val="accent1"/>
-          </a:lnRef>
-          <a:fillRef idx="3">
-            <a:schemeClr val="accent1"/>
-          </a:fillRef>
-          <a:effectRef idx="2">
-            <a:schemeClr val="accent1"/>
-          </a:effectRef>
-          <a:fontRef idx="minor">
-            <a:schemeClr val="lt1"/>
-          </a:fontRef>
-        </p:style>
         <p:txBody>
           <a:bodyPr rtlCol="0" anchor="ctr"/>
           <a:lstStyle/>
@@ -5524,7 +5230,7 @@
       </p:sp>
       <p:sp>
         <p:nvSpPr>
-          <p:cNvPr id="8" name="TextBox 7"/>
+          <p:cNvPr id="7" name="TextBox 6"/>
           <p:cNvSpPr txBox="1"/>
           <p:nvPr/>
         </p:nvSpPr>
@@ -5559,7 +5265,7 @@
       </p:sp>
       <p:sp>
         <p:nvSpPr>
-          <p:cNvPr id="9" name="TextBox 8"/>
+          <p:cNvPr id="8" name="TextBox 7"/>
           <p:cNvSpPr txBox="1"/>
           <p:nvPr/>
         </p:nvSpPr>
@@ -5630,7 +5336,7 @@
       </p:sp>
       <p:sp>
         <p:nvSpPr>
-          <p:cNvPr id="10" name="Rounded Rectangle 9"/>
+          <p:cNvPr id="9" name="Rounded Rectangle 8"/>
           <p:cNvSpPr/>
           <p:nvPr/>
         </p:nvSpPr>
@@ -5651,20 +5357,6 @@
             <a:noFill/>
           </a:ln>
         </p:spPr>
-        <p:style>
-          <a:lnRef idx="1">
-            <a:schemeClr val="accent1"/>
-          </a:lnRef>
-          <a:fillRef idx="3">
-            <a:schemeClr val="accent1"/>
-          </a:fillRef>
-          <a:effectRef idx="2">
-            <a:schemeClr val="accent1"/>
-          </a:effectRef>
-          <a:fontRef idx="minor">
-            <a:schemeClr val="lt1"/>
-          </a:fontRef>
-        </p:style>
         <p:txBody>
           <a:bodyPr rtlCol="0" anchor="ctr"/>
           <a:lstStyle/>
@@ -5675,7 +5367,7 @@
       </p:sp>
       <p:sp>
         <p:nvSpPr>
-          <p:cNvPr id="11" name="Rounded Rectangle 10"/>
+          <p:cNvPr id="10" name="Rounded Rectangle 9"/>
           <p:cNvSpPr/>
           <p:nvPr/>
         </p:nvSpPr>
@@ -5696,20 +5388,6 @@
             <a:noFill/>
           </a:ln>
         </p:spPr>
-        <p:style>
-          <a:lnRef idx="1">
-            <a:schemeClr val="accent1"/>
-          </a:lnRef>
-          <a:fillRef idx="3">
-            <a:schemeClr val="accent1"/>
-          </a:fillRef>
-          <a:effectRef idx="2">
-            <a:schemeClr val="accent1"/>
-          </a:effectRef>
-          <a:fontRef idx="minor">
-            <a:schemeClr val="lt1"/>
-          </a:fontRef>
-        </p:style>
         <p:txBody>
           <a:bodyPr rtlCol="0" anchor="ctr"/>
           <a:lstStyle/>
@@ -5720,7 +5398,7 @@
       </p:sp>
       <p:sp>
         <p:nvSpPr>
-          <p:cNvPr id="12" name="TextBox 11"/>
+          <p:cNvPr id="11" name="TextBox 10"/>
           <p:cNvSpPr txBox="1"/>
           <p:nvPr/>
         </p:nvSpPr>
@@ -5755,7 +5433,7 @@
       </p:sp>
       <p:sp>
         <p:nvSpPr>
-          <p:cNvPr id="13" name="TextBox 12"/>
+          <p:cNvPr id="12" name="TextBox 11"/>
           <p:cNvSpPr txBox="1"/>
           <p:nvPr/>
         </p:nvSpPr>
@@ -5826,7 +5504,7 @@
       </p:sp>
       <p:sp>
         <p:nvSpPr>
-          <p:cNvPr id="14" name="Rounded Rectangle 13"/>
+          <p:cNvPr id="13" name="Rounded Rectangle 12"/>
           <p:cNvSpPr/>
           <p:nvPr/>
         </p:nvSpPr>
@@ -5847,20 +5525,6 @@
             <a:noFill/>
           </a:ln>
         </p:spPr>
-        <p:style>
-          <a:lnRef idx="1">
-            <a:schemeClr val="accent1"/>
-          </a:lnRef>
-          <a:fillRef idx="3">
-            <a:schemeClr val="accent1"/>
-          </a:fillRef>
-          <a:effectRef idx="2">
-            <a:schemeClr val="accent1"/>
-          </a:effectRef>
-          <a:fontRef idx="minor">
-            <a:schemeClr val="lt1"/>
-          </a:fontRef>
-        </p:style>
         <p:txBody>
           <a:bodyPr rtlCol="0" anchor="ctr"/>
           <a:lstStyle/>
@@ -5871,7 +5535,7 @@
       </p:sp>
       <p:sp>
         <p:nvSpPr>
-          <p:cNvPr id="15" name="Rounded Rectangle 14"/>
+          <p:cNvPr id="14" name="Rounded Rectangle 13"/>
           <p:cNvSpPr/>
           <p:nvPr/>
         </p:nvSpPr>
@@ -5892,20 +5556,6 @@
             <a:noFill/>
           </a:ln>
         </p:spPr>
-        <p:style>
-          <a:lnRef idx="1">
-            <a:schemeClr val="accent1"/>
-          </a:lnRef>
-          <a:fillRef idx="3">
-            <a:schemeClr val="accent1"/>
-          </a:fillRef>
-          <a:effectRef idx="2">
-            <a:schemeClr val="accent1"/>
-          </a:effectRef>
-          <a:fontRef idx="minor">
-            <a:schemeClr val="lt1"/>
-          </a:fontRef>
-        </p:style>
         <p:txBody>
           <a:bodyPr rtlCol="0" anchor="ctr"/>
           <a:lstStyle/>
@@ -5916,7 +5566,7 @@
       </p:sp>
       <p:sp>
         <p:nvSpPr>
-          <p:cNvPr id="16" name="TextBox 15"/>
+          <p:cNvPr id="15" name="TextBox 14"/>
           <p:cNvSpPr txBox="1"/>
           <p:nvPr/>
         </p:nvSpPr>
@@ -5951,7 +5601,7 @@
       </p:sp>
       <p:sp>
         <p:nvSpPr>
-          <p:cNvPr id="17" name="TextBox 16"/>
+          <p:cNvPr id="16" name="TextBox 15"/>
           <p:cNvSpPr txBox="1"/>
           <p:nvPr/>
         </p:nvSpPr>
@@ -6022,7 +5672,7 @@
       </p:sp>
       <p:sp>
         <p:nvSpPr>
-          <p:cNvPr id="18" name="TextBox 17"/>
+          <p:cNvPr id="17" name="TextBox 16"/>
           <p:cNvSpPr txBox="1"/>
           <p:nvPr/>
         </p:nvSpPr>
@@ -6057,7 +5707,7 @@
       </p:sp>
       <p:sp>
         <p:nvSpPr>
-          <p:cNvPr id="19" name="TextBox 18"/>
+          <p:cNvPr id="18" name="TextBox 17"/>
           <p:cNvSpPr txBox="1"/>
           <p:nvPr/>
         </p:nvSpPr>
@@ -6101,6 +5751,14 @@
 <file path=ppt/slides/slide13.xml><?xml version="1.0" encoding="utf-8"?>
 <p:sld xmlns:a="http://schemas.openxmlformats.org/drawingml/2006/main" xmlns:p="http://schemas.openxmlformats.org/presentationml/2006/main" xmlns:r="http://schemas.openxmlformats.org/officeDocument/2006/relationships">
   <p:cSld>
+    <p:bg>
+      <p:bgPr>
+        <a:solidFill>
+          <a:srgbClr val="F6EEE2"/>
+        </a:solidFill>
+        <a:effectLst/>
+      </p:bgPr>
+    </p:bg>
     <p:spTree>
       <p:nvGrpSpPr>
         <p:cNvPr id="1" name=""/>
@@ -6116,49 +5774,6 @@
         </p:nvSpPr>
         <p:spPr>
           <a:xfrm>
-            <a:off x="0" y="0"/>
-            <a:ext cx="12191695" cy="6858000"/>
-          </a:xfrm>
-          <a:prstGeom prst="rect">
-            <a:avLst/>
-          </a:prstGeom>
-          <a:solidFill>
-            <a:srgbClr val="F6EEE2"/>
-          </a:solidFill>
-          <a:ln>
-            <a:noFill/>
-          </a:ln>
-        </p:spPr>
-        <p:style>
-          <a:lnRef idx="1">
-            <a:schemeClr val="accent1"/>
-          </a:lnRef>
-          <a:fillRef idx="3">
-            <a:schemeClr val="accent1"/>
-          </a:fillRef>
-          <a:effectRef idx="2">
-            <a:schemeClr val="accent1"/>
-          </a:effectRef>
-          <a:fontRef idx="minor">
-            <a:schemeClr val="lt1"/>
-          </a:fontRef>
-        </p:style>
-        <p:txBody>
-          <a:bodyPr rtlCol="0" anchor="ctr"/>
-          <a:lstStyle/>
-          <a:p>
-            <a:pPr algn="ctr"/>
-          </a:p>
-        </p:txBody>
-      </p:sp>
-      <p:sp>
-        <p:nvSpPr>
-          <p:cNvPr id="3" name="Rectangle 2"/>
-          <p:cNvSpPr/>
-          <p:nvPr/>
-        </p:nvSpPr>
-        <p:spPr>
-          <a:xfrm>
             <a:off x="548640" y="548640"/>
             <a:ext cx="548640" cy="73152"/>
           </a:xfrm>
@@ -6172,20 +5787,6 @@
             <a:noFill/>
           </a:ln>
         </p:spPr>
-        <p:style>
-          <a:lnRef idx="1">
-            <a:schemeClr val="accent1"/>
-          </a:lnRef>
-          <a:fillRef idx="3">
-            <a:schemeClr val="accent1"/>
-          </a:fillRef>
-          <a:effectRef idx="2">
-            <a:schemeClr val="accent1"/>
-          </a:effectRef>
-          <a:fontRef idx="minor">
-            <a:schemeClr val="lt1"/>
-          </a:fontRef>
-        </p:style>
         <p:txBody>
           <a:bodyPr rtlCol="0" anchor="ctr"/>
           <a:lstStyle/>
@@ -6196,7 +5797,7 @@
       </p:sp>
       <p:sp>
         <p:nvSpPr>
-          <p:cNvPr id="4" name="TextBox 3"/>
+          <p:cNvPr id="3" name="TextBox 2"/>
           <p:cNvSpPr txBox="1"/>
           <p:nvPr/>
         </p:nvSpPr>
@@ -6231,7 +5832,7 @@
       </p:sp>
       <p:sp>
         <p:nvSpPr>
-          <p:cNvPr id="5" name="TextBox 4"/>
+          <p:cNvPr id="4" name="TextBox 3"/>
           <p:cNvSpPr txBox="1"/>
           <p:nvPr/>
         </p:nvSpPr>
@@ -6278,7 +5879,7 @@
       </p:sp>
       <p:sp>
         <p:nvSpPr>
-          <p:cNvPr id="6" name="TextBox 5"/>
+          <p:cNvPr id="5" name="TextBox 4"/>
           <p:cNvSpPr txBox="1"/>
           <p:nvPr/>
         </p:nvSpPr>
@@ -6313,7 +5914,7 @@
       </p:sp>
       <p:sp>
         <p:nvSpPr>
-          <p:cNvPr id="7" name="TextBox 6"/>
+          <p:cNvPr id="6" name="TextBox 5"/>
           <p:cNvSpPr txBox="1"/>
           <p:nvPr/>
         </p:nvSpPr>
@@ -6372,7 +5973,7 @@
       </p:sp>
       <p:sp>
         <p:nvSpPr>
-          <p:cNvPr id="8" name="TextBox 7"/>
+          <p:cNvPr id="7" name="TextBox 6"/>
           <p:cNvSpPr txBox="1"/>
           <p:nvPr/>
         </p:nvSpPr>
@@ -6407,7 +6008,7 @@
       </p:sp>
       <p:sp>
         <p:nvSpPr>
-          <p:cNvPr id="9" name="TextBox 8"/>
+          <p:cNvPr id="8" name="TextBox 7"/>
           <p:cNvSpPr txBox="1"/>
           <p:nvPr/>
         </p:nvSpPr>
@@ -6466,7 +6067,7 @@
       </p:sp>
       <p:sp>
         <p:nvSpPr>
-          <p:cNvPr id="10" name="TextBox 9"/>
+          <p:cNvPr id="9" name="TextBox 8"/>
           <p:cNvSpPr txBox="1"/>
           <p:nvPr/>
         </p:nvSpPr>
@@ -6501,7 +6102,7 @@
       </p:sp>
       <p:sp>
         <p:nvSpPr>
-          <p:cNvPr id="11" name="TextBox 10"/>
+          <p:cNvPr id="10" name="TextBox 9"/>
           <p:cNvSpPr txBox="1"/>
           <p:nvPr/>
         </p:nvSpPr>
@@ -6545,6 +6146,14 @@
 <file path=ppt/slides/slide14.xml><?xml version="1.0" encoding="utf-8"?>
 <p:sld xmlns:a="http://schemas.openxmlformats.org/drawingml/2006/main" xmlns:p="http://schemas.openxmlformats.org/presentationml/2006/main" xmlns:r="http://schemas.openxmlformats.org/officeDocument/2006/relationships">
   <p:cSld>
+    <p:bg>
+      <p:bgPr>
+        <a:solidFill>
+          <a:srgbClr val="F6EEE2"/>
+        </a:solidFill>
+        <a:effectLst/>
+      </p:bgPr>
+    </p:bg>
     <p:spTree>
       <p:nvGrpSpPr>
         <p:cNvPr id="1" name=""/>
@@ -6554,50 +6163,7 @@
       <p:grpSpPr/>
       <p:sp>
         <p:nvSpPr>
-          <p:cNvPr id="2" name="Rectangle 1"/>
-          <p:cNvSpPr/>
-          <p:nvPr/>
-        </p:nvSpPr>
-        <p:spPr>
-          <a:xfrm>
-            <a:off x="0" y="0"/>
-            <a:ext cx="12191695" cy="6858000"/>
-          </a:xfrm>
-          <a:prstGeom prst="rect">
-            <a:avLst/>
-          </a:prstGeom>
-          <a:solidFill>
-            <a:srgbClr val="F6EEE2"/>
-          </a:solidFill>
-          <a:ln>
-            <a:noFill/>
-          </a:ln>
-        </p:spPr>
-        <p:style>
-          <a:lnRef idx="1">
-            <a:schemeClr val="accent1"/>
-          </a:lnRef>
-          <a:fillRef idx="3">
-            <a:schemeClr val="accent1"/>
-          </a:fillRef>
-          <a:effectRef idx="2">
-            <a:schemeClr val="accent1"/>
-          </a:effectRef>
-          <a:fontRef idx="minor">
-            <a:schemeClr val="lt1"/>
-          </a:fontRef>
-        </p:style>
-        <p:txBody>
-          <a:bodyPr rtlCol="0" anchor="ctr"/>
-          <a:lstStyle/>
-          <a:p>
-            <a:pPr algn="ctr"/>
-          </a:p>
-        </p:txBody>
-      </p:sp>
-      <p:sp>
-        <p:nvSpPr>
-          <p:cNvPr id="3" name="TextBox 2"/>
+          <p:cNvPr id="2" name="TextBox 1"/>
           <p:cNvSpPr txBox="1"/>
           <p:nvPr/>
         </p:nvSpPr>
@@ -6644,7 +6210,7 @@
       </p:sp>
       <p:sp>
         <p:nvSpPr>
-          <p:cNvPr id="4" name="TextBox 3"/>
+          <p:cNvPr id="3" name="TextBox 2"/>
           <p:cNvSpPr txBox="1"/>
           <p:nvPr/>
         </p:nvSpPr>
@@ -6679,7 +6245,7 @@
       </p:sp>
       <p:sp>
         <p:nvSpPr>
-          <p:cNvPr id="5" name="TextBox 4"/>
+          <p:cNvPr id="4" name="TextBox 3"/>
           <p:cNvSpPr txBox="1"/>
           <p:nvPr/>
         </p:nvSpPr>
@@ -6714,7 +6280,7 @@
       </p:sp>
       <p:sp>
         <p:nvSpPr>
-          <p:cNvPr id="6" name="TextBox 5"/>
+          <p:cNvPr id="5" name="TextBox 4"/>
           <p:cNvSpPr txBox="1"/>
           <p:nvPr/>
         </p:nvSpPr>
@@ -6749,7 +6315,7 @@
       </p:sp>
       <p:sp>
         <p:nvSpPr>
-          <p:cNvPr id="7" name="TextBox 6"/>
+          <p:cNvPr id="6" name="TextBox 5"/>
           <p:cNvSpPr txBox="1"/>
           <p:nvPr/>
         </p:nvSpPr>
@@ -6784,7 +6350,7 @@
       </p:sp>
       <p:sp>
         <p:nvSpPr>
-          <p:cNvPr id="8" name="TextBox 7"/>
+          <p:cNvPr id="7" name="TextBox 6"/>
           <p:cNvSpPr txBox="1"/>
           <p:nvPr/>
         </p:nvSpPr>
@@ -6828,6 +6394,14 @@
 <file path=ppt/slides/slide2.xml><?xml version="1.0" encoding="utf-8"?>
 <p:sld xmlns:a="http://schemas.openxmlformats.org/drawingml/2006/main" xmlns:p="http://schemas.openxmlformats.org/presentationml/2006/main" xmlns:r="http://schemas.openxmlformats.org/officeDocument/2006/relationships">
   <p:cSld>
+    <p:bg>
+      <p:bgPr>
+        <a:solidFill>
+          <a:srgbClr val="F6EEE2"/>
+        </a:solidFill>
+        <a:effectLst/>
+      </p:bgPr>
+    </p:bg>
     <p:spTree>
       <p:nvGrpSpPr>
         <p:cNvPr id="1" name=""/>
@@ -6843,49 +6417,6 @@
         </p:nvSpPr>
         <p:spPr>
           <a:xfrm>
-            <a:off x="0" y="0"/>
-            <a:ext cx="12191695" cy="6858000"/>
-          </a:xfrm>
-          <a:prstGeom prst="rect">
-            <a:avLst/>
-          </a:prstGeom>
-          <a:solidFill>
-            <a:srgbClr val="F6EEE2"/>
-          </a:solidFill>
-          <a:ln>
-            <a:noFill/>
-          </a:ln>
-        </p:spPr>
-        <p:style>
-          <a:lnRef idx="1">
-            <a:schemeClr val="accent1"/>
-          </a:lnRef>
-          <a:fillRef idx="3">
-            <a:schemeClr val="accent1"/>
-          </a:fillRef>
-          <a:effectRef idx="2">
-            <a:schemeClr val="accent1"/>
-          </a:effectRef>
-          <a:fontRef idx="minor">
-            <a:schemeClr val="lt1"/>
-          </a:fontRef>
-        </p:style>
-        <p:txBody>
-          <a:bodyPr rtlCol="0" anchor="ctr"/>
-          <a:lstStyle/>
-          <a:p>
-            <a:pPr algn="ctr"/>
-          </a:p>
-        </p:txBody>
-      </p:sp>
-      <p:sp>
-        <p:nvSpPr>
-          <p:cNvPr id="3" name="Rectangle 2"/>
-          <p:cNvSpPr/>
-          <p:nvPr/>
-        </p:nvSpPr>
-        <p:spPr>
-          <a:xfrm>
             <a:off x="548640" y="548640"/>
             <a:ext cx="548640" cy="73152"/>
           </a:xfrm>
@@ -6899,20 +6430,6 @@
             <a:noFill/>
           </a:ln>
         </p:spPr>
-        <p:style>
-          <a:lnRef idx="1">
-            <a:schemeClr val="accent1"/>
-          </a:lnRef>
-          <a:fillRef idx="3">
-            <a:schemeClr val="accent1"/>
-          </a:fillRef>
-          <a:effectRef idx="2">
-            <a:schemeClr val="accent1"/>
-          </a:effectRef>
-          <a:fontRef idx="minor">
-            <a:schemeClr val="lt1"/>
-          </a:fontRef>
-        </p:style>
         <p:txBody>
           <a:bodyPr rtlCol="0" anchor="ctr"/>
           <a:lstStyle/>
@@ -6923,7 +6440,7 @@
       </p:sp>
       <p:sp>
         <p:nvSpPr>
-          <p:cNvPr id="4" name="TextBox 3"/>
+          <p:cNvPr id="3" name="TextBox 2"/>
           <p:cNvSpPr txBox="1"/>
           <p:nvPr/>
         </p:nvSpPr>
@@ -6958,7 +6475,7 @@
       </p:sp>
       <p:sp>
         <p:nvSpPr>
-          <p:cNvPr id="5" name="TextBox 4"/>
+          <p:cNvPr id="4" name="TextBox 3"/>
           <p:cNvSpPr txBox="1"/>
           <p:nvPr/>
         </p:nvSpPr>
@@ -7005,7 +6522,7 @@
       </p:sp>
       <p:sp>
         <p:nvSpPr>
-          <p:cNvPr id="6" name="Rounded Rectangle 5"/>
+          <p:cNvPr id="5" name="Rounded Rectangle 4"/>
           <p:cNvSpPr/>
           <p:nvPr/>
         </p:nvSpPr>
@@ -7026,20 +6543,6 @@
             <a:noFill/>
           </a:ln>
         </p:spPr>
-        <p:style>
-          <a:lnRef idx="1">
-            <a:schemeClr val="accent1"/>
-          </a:lnRef>
-          <a:fillRef idx="3">
-            <a:schemeClr val="accent1"/>
-          </a:fillRef>
-          <a:effectRef idx="2">
-            <a:schemeClr val="accent1"/>
-          </a:effectRef>
-          <a:fontRef idx="minor">
-            <a:schemeClr val="lt1"/>
-          </a:fontRef>
-        </p:style>
         <p:txBody>
           <a:bodyPr rtlCol="0" anchor="ctr"/>
           <a:lstStyle/>
@@ -7050,7 +6553,7 @@
       </p:sp>
       <p:sp>
         <p:nvSpPr>
-          <p:cNvPr id="7" name="TextBox 6"/>
+          <p:cNvPr id="6" name="TextBox 5"/>
           <p:cNvSpPr txBox="1"/>
           <p:nvPr/>
         </p:nvSpPr>
@@ -7085,7 +6588,7 @@
       </p:sp>
       <p:sp>
         <p:nvSpPr>
-          <p:cNvPr id="8" name="TextBox 7"/>
+          <p:cNvPr id="7" name="TextBox 6"/>
           <p:cNvSpPr txBox="1"/>
           <p:nvPr/>
         </p:nvSpPr>
@@ -7132,7 +6635,7 @@
       </p:sp>
       <p:sp>
         <p:nvSpPr>
-          <p:cNvPr id="9" name="TextBox 8"/>
+          <p:cNvPr id="8" name="TextBox 7"/>
           <p:cNvSpPr txBox="1"/>
           <p:nvPr/>
         </p:nvSpPr>
@@ -7167,7 +6670,7 @@
       </p:sp>
       <p:sp>
         <p:nvSpPr>
-          <p:cNvPr id="10" name="Rounded Rectangle 9"/>
+          <p:cNvPr id="9" name="Rounded Rectangle 8"/>
           <p:cNvSpPr/>
           <p:nvPr/>
         </p:nvSpPr>
@@ -7188,20 +6691,6 @@
             <a:noFill/>
           </a:ln>
         </p:spPr>
-        <p:style>
-          <a:lnRef idx="1">
-            <a:schemeClr val="accent1"/>
-          </a:lnRef>
-          <a:fillRef idx="3">
-            <a:schemeClr val="accent1"/>
-          </a:fillRef>
-          <a:effectRef idx="2">
-            <a:schemeClr val="accent1"/>
-          </a:effectRef>
-          <a:fontRef idx="minor">
-            <a:schemeClr val="lt1"/>
-          </a:fontRef>
-        </p:style>
         <p:txBody>
           <a:bodyPr rtlCol="0" anchor="ctr"/>
           <a:lstStyle/>
@@ -7212,7 +6701,7 @@
       </p:sp>
       <p:sp>
         <p:nvSpPr>
-          <p:cNvPr id="11" name="TextBox 10"/>
+          <p:cNvPr id="10" name="TextBox 9"/>
           <p:cNvSpPr txBox="1"/>
           <p:nvPr/>
         </p:nvSpPr>
@@ -7247,7 +6736,7 @@
       </p:sp>
       <p:sp>
         <p:nvSpPr>
-          <p:cNvPr id="12" name="TextBox 11"/>
+          <p:cNvPr id="11" name="TextBox 10"/>
           <p:cNvSpPr txBox="1"/>
           <p:nvPr/>
         </p:nvSpPr>
@@ -7294,7 +6783,7 @@
       </p:sp>
       <p:sp>
         <p:nvSpPr>
-          <p:cNvPr id="13" name="TextBox 12"/>
+          <p:cNvPr id="12" name="TextBox 11"/>
           <p:cNvSpPr txBox="1"/>
           <p:nvPr/>
         </p:nvSpPr>
@@ -7329,7 +6818,7 @@
       </p:sp>
       <p:sp>
         <p:nvSpPr>
-          <p:cNvPr id="14" name="Rounded Rectangle 13"/>
+          <p:cNvPr id="13" name="Rounded Rectangle 12"/>
           <p:cNvSpPr/>
           <p:nvPr/>
         </p:nvSpPr>
@@ -7350,20 +6839,6 @@
             <a:noFill/>
           </a:ln>
         </p:spPr>
-        <p:style>
-          <a:lnRef idx="1">
-            <a:schemeClr val="accent1"/>
-          </a:lnRef>
-          <a:fillRef idx="3">
-            <a:schemeClr val="accent1"/>
-          </a:fillRef>
-          <a:effectRef idx="2">
-            <a:schemeClr val="accent1"/>
-          </a:effectRef>
-          <a:fontRef idx="minor">
-            <a:schemeClr val="lt1"/>
-          </a:fontRef>
-        </p:style>
         <p:txBody>
           <a:bodyPr rtlCol="0" anchor="ctr"/>
           <a:lstStyle/>
@@ -7374,7 +6849,7 @@
       </p:sp>
       <p:sp>
         <p:nvSpPr>
-          <p:cNvPr id="15" name="TextBox 14"/>
+          <p:cNvPr id="14" name="TextBox 13"/>
           <p:cNvSpPr txBox="1"/>
           <p:nvPr/>
         </p:nvSpPr>
@@ -7409,7 +6884,7 @@
       </p:sp>
       <p:sp>
         <p:nvSpPr>
-          <p:cNvPr id="16" name="TextBox 15"/>
+          <p:cNvPr id="15" name="TextBox 14"/>
           <p:cNvSpPr txBox="1"/>
           <p:nvPr/>
         </p:nvSpPr>
@@ -7456,7 +6931,7 @@
       </p:sp>
       <p:sp>
         <p:nvSpPr>
-          <p:cNvPr id="17" name="TextBox 16"/>
+          <p:cNvPr id="16" name="TextBox 15"/>
           <p:cNvSpPr txBox="1"/>
           <p:nvPr/>
         </p:nvSpPr>
@@ -7491,7 +6966,7 @@
       </p:sp>
       <p:sp>
         <p:nvSpPr>
-          <p:cNvPr id="18" name="Rounded Rectangle 17"/>
+          <p:cNvPr id="17" name="Rounded Rectangle 16"/>
           <p:cNvSpPr/>
           <p:nvPr/>
         </p:nvSpPr>
@@ -7512,20 +6987,6 @@
             <a:noFill/>
           </a:ln>
         </p:spPr>
-        <p:style>
-          <a:lnRef idx="1">
-            <a:schemeClr val="accent1"/>
-          </a:lnRef>
-          <a:fillRef idx="3">
-            <a:schemeClr val="accent1"/>
-          </a:fillRef>
-          <a:effectRef idx="2">
-            <a:schemeClr val="accent1"/>
-          </a:effectRef>
-          <a:fontRef idx="minor">
-            <a:schemeClr val="lt1"/>
-          </a:fontRef>
-        </p:style>
         <p:txBody>
           <a:bodyPr rtlCol="0" anchor="ctr"/>
           <a:lstStyle/>
@@ -7536,7 +6997,7 @@
       </p:sp>
       <p:sp>
         <p:nvSpPr>
-          <p:cNvPr id="19" name="TextBox 18"/>
+          <p:cNvPr id="18" name="TextBox 17"/>
           <p:cNvSpPr txBox="1"/>
           <p:nvPr/>
         </p:nvSpPr>
@@ -7571,7 +7032,7 @@
       </p:sp>
       <p:sp>
         <p:nvSpPr>
-          <p:cNvPr id="20" name="TextBox 19"/>
+          <p:cNvPr id="19" name="TextBox 18"/>
           <p:cNvSpPr txBox="1"/>
           <p:nvPr/>
         </p:nvSpPr>
@@ -7630,7 +7091,7 @@
       </p:sp>
       <p:sp>
         <p:nvSpPr>
-          <p:cNvPr id="21" name="TextBox 20"/>
+          <p:cNvPr id="20" name="TextBox 19"/>
           <p:cNvSpPr txBox="1"/>
           <p:nvPr/>
         </p:nvSpPr>
@@ -7665,7 +7126,7 @@
       </p:sp>
       <p:sp>
         <p:nvSpPr>
-          <p:cNvPr id="22" name="TextBox 21"/>
+          <p:cNvPr id="21" name="TextBox 20"/>
           <p:cNvSpPr txBox="1"/>
           <p:nvPr/>
         </p:nvSpPr>
@@ -7700,7 +7161,7 @@
       </p:sp>
       <p:sp>
         <p:nvSpPr>
-          <p:cNvPr id="23" name="TextBox 22"/>
+          <p:cNvPr id="22" name="TextBox 21"/>
           <p:cNvSpPr txBox="1"/>
           <p:nvPr/>
         </p:nvSpPr>
@@ -7744,6 +7205,14 @@
 <file path=ppt/slides/slide3.xml><?xml version="1.0" encoding="utf-8"?>
 <p:sld xmlns:a="http://schemas.openxmlformats.org/drawingml/2006/main" xmlns:p="http://schemas.openxmlformats.org/presentationml/2006/main" xmlns:r="http://schemas.openxmlformats.org/officeDocument/2006/relationships">
   <p:cSld>
+    <p:bg>
+      <p:bgPr>
+        <a:solidFill>
+          <a:srgbClr val="F6EEE2"/>
+        </a:solidFill>
+        <a:effectLst/>
+      </p:bgPr>
+    </p:bg>
     <p:spTree>
       <p:nvGrpSpPr>
         <p:cNvPr id="1" name=""/>
@@ -7759,49 +7228,6 @@
         </p:nvSpPr>
         <p:spPr>
           <a:xfrm>
-            <a:off x="0" y="0"/>
-            <a:ext cx="12191695" cy="6858000"/>
-          </a:xfrm>
-          <a:prstGeom prst="rect">
-            <a:avLst/>
-          </a:prstGeom>
-          <a:solidFill>
-            <a:srgbClr val="F6EEE2"/>
-          </a:solidFill>
-          <a:ln>
-            <a:noFill/>
-          </a:ln>
-        </p:spPr>
-        <p:style>
-          <a:lnRef idx="1">
-            <a:schemeClr val="accent1"/>
-          </a:lnRef>
-          <a:fillRef idx="3">
-            <a:schemeClr val="accent1"/>
-          </a:fillRef>
-          <a:effectRef idx="2">
-            <a:schemeClr val="accent1"/>
-          </a:effectRef>
-          <a:fontRef idx="minor">
-            <a:schemeClr val="lt1"/>
-          </a:fontRef>
-        </p:style>
-        <p:txBody>
-          <a:bodyPr rtlCol="0" anchor="ctr"/>
-          <a:lstStyle/>
-          <a:p>
-            <a:pPr algn="ctr"/>
-          </a:p>
-        </p:txBody>
-      </p:sp>
-      <p:sp>
-        <p:nvSpPr>
-          <p:cNvPr id="3" name="Rectangle 2"/>
-          <p:cNvSpPr/>
-          <p:nvPr/>
-        </p:nvSpPr>
-        <p:spPr>
-          <a:xfrm>
             <a:off x="548640" y="548640"/>
             <a:ext cx="548640" cy="73152"/>
           </a:xfrm>
@@ -7815,20 +7241,6 @@
             <a:noFill/>
           </a:ln>
         </p:spPr>
-        <p:style>
-          <a:lnRef idx="1">
-            <a:schemeClr val="accent1"/>
-          </a:lnRef>
-          <a:fillRef idx="3">
-            <a:schemeClr val="accent1"/>
-          </a:fillRef>
-          <a:effectRef idx="2">
-            <a:schemeClr val="accent1"/>
-          </a:effectRef>
-          <a:fontRef idx="minor">
-            <a:schemeClr val="lt1"/>
-          </a:fontRef>
-        </p:style>
         <p:txBody>
           <a:bodyPr rtlCol="0" anchor="ctr"/>
           <a:lstStyle/>
@@ -7839,7 +7251,7 @@
       </p:sp>
       <p:sp>
         <p:nvSpPr>
-          <p:cNvPr id="4" name="TextBox 3"/>
+          <p:cNvPr id="3" name="TextBox 2"/>
           <p:cNvSpPr txBox="1"/>
           <p:nvPr/>
         </p:nvSpPr>
@@ -7874,7 +7286,7 @@
       </p:sp>
       <p:sp>
         <p:nvSpPr>
-          <p:cNvPr id="5" name="TextBox 4"/>
+          <p:cNvPr id="4" name="TextBox 3"/>
           <p:cNvSpPr txBox="1"/>
           <p:nvPr/>
         </p:nvSpPr>
@@ -7909,7 +7321,7 @@
       </p:sp>
       <p:sp>
         <p:nvSpPr>
-          <p:cNvPr id="6" name="Oval 5"/>
+          <p:cNvPr id="5" name="Oval 4"/>
           <p:cNvSpPr/>
           <p:nvPr/>
         </p:nvSpPr>
@@ -7928,20 +7340,6 @@
             <a:noFill/>
           </a:ln>
         </p:spPr>
-        <p:style>
-          <a:lnRef idx="1">
-            <a:schemeClr val="accent1"/>
-          </a:lnRef>
-          <a:fillRef idx="3">
-            <a:schemeClr val="accent1"/>
-          </a:fillRef>
-          <a:effectRef idx="2">
-            <a:schemeClr val="accent1"/>
-          </a:effectRef>
-          <a:fontRef idx="minor">
-            <a:schemeClr val="lt1"/>
-          </a:fontRef>
-        </p:style>
         <p:txBody>
           <a:bodyPr rtlCol="0" anchor="ctr"/>
           <a:lstStyle/>
@@ -7952,7 +7350,7 @@
       </p:sp>
       <p:sp>
         <p:nvSpPr>
-          <p:cNvPr id="7" name="TextBox 6"/>
+          <p:cNvPr id="6" name="TextBox 5"/>
           <p:cNvSpPr txBox="1"/>
           <p:nvPr/>
         </p:nvSpPr>
@@ -7987,7 +7385,7 @@
       </p:sp>
       <p:sp>
         <p:nvSpPr>
-          <p:cNvPr id="8" name="TextBox 7"/>
+          <p:cNvPr id="7" name="TextBox 6"/>
           <p:cNvSpPr txBox="1"/>
           <p:nvPr/>
         </p:nvSpPr>
@@ -8046,7 +7444,7 @@
       </p:sp>
       <p:sp>
         <p:nvSpPr>
-          <p:cNvPr id="9" name="Oval 8"/>
+          <p:cNvPr id="8" name="Oval 7"/>
           <p:cNvSpPr/>
           <p:nvPr/>
         </p:nvSpPr>
@@ -8065,20 +7463,6 @@
             <a:noFill/>
           </a:ln>
         </p:spPr>
-        <p:style>
-          <a:lnRef idx="1">
-            <a:schemeClr val="accent1"/>
-          </a:lnRef>
-          <a:fillRef idx="3">
-            <a:schemeClr val="accent1"/>
-          </a:fillRef>
-          <a:effectRef idx="2">
-            <a:schemeClr val="accent1"/>
-          </a:effectRef>
-          <a:fontRef idx="minor">
-            <a:schemeClr val="lt1"/>
-          </a:fontRef>
-        </p:style>
         <p:txBody>
           <a:bodyPr rtlCol="0" anchor="ctr"/>
           <a:lstStyle/>
@@ -8089,7 +7473,7 @@
       </p:sp>
       <p:sp>
         <p:nvSpPr>
-          <p:cNvPr id="10" name="TextBox 9"/>
+          <p:cNvPr id="9" name="TextBox 8"/>
           <p:cNvSpPr txBox="1"/>
           <p:nvPr/>
         </p:nvSpPr>
@@ -8124,7 +7508,7 @@
       </p:sp>
       <p:sp>
         <p:nvSpPr>
-          <p:cNvPr id="11" name="TextBox 10"/>
+          <p:cNvPr id="10" name="TextBox 9"/>
           <p:cNvSpPr txBox="1"/>
           <p:nvPr/>
         </p:nvSpPr>
@@ -8183,7 +7567,7 @@
       </p:sp>
       <p:sp>
         <p:nvSpPr>
-          <p:cNvPr id="12" name="Oval 11"/>
+          <p:cNvPr id="11" name="Oval 10"/>
           <p:cNvSpPr/>
           <p:nvPr/>
         </p:nvSpPr>
@@ -8202,20 +7586,6 @@
             <a:noFill/>
           </a:ln>
         </p:spPr>
-        <p:style>
-          <a:lnRef idx="1">
-            <a:schemeClr val="accent1"/>
-          </a:lnRef>
-          <a:fillRef idx="3">
-            <a:schemeClr val="accent1"/>
-          </a:fillRef>
-          <a:effectRef idx="2">
-            <a:schemeClr val="accent1"/>
-          </a:effectRef>
-          <a:fontRef idx="minor">
-            <a:schemeClr val="lt1"/>
-          </a:fontRef>
-        </p:style>
         <p:txBody>
           <a:bodyPr rtlCol="0" anchor="ctr"/>
           <a:lstStyle/>
@@ -8226,7 +7596,7 @@
       </p:sp>
       <p:sp>
         <p:nvSpPr>
-          <p:cNvPr id="13" name="TextBox 12"/>
+          <p:cNvPr id="12" name="TextBox 11"/>
           <p:cNvSpPr txBox="1"/>
           <p:nvPr/>
         </p:nvSpPr>
@@ -8261,7 +7631,7 @@
       </p:sp>
       <p:sp>
         <p:nvSpPr>
-          <p:cNvPr id="14" name="TextBox 13"/>
+          <p:cNvPr id="13" name="TextBox 12"/>
           <p:cNvSpPr txBox="1"/>
           <p:nvPr/>
         </p:nvSpPr>
@@ -8320,7 +7690,7 @@
       </p:sp>
       <p:sp>
         <p:nvSpPr>
-          <p:cNvPr id="15" name="TextBox 14"/>
+          <p:cNvPr id="14" name="TextBox 13"/>
           <p:cNvSpPr txBox="1"/>
           <p:nvPr/>
         </p:nvSpPr>
@@ -8355,7 +7725,7 @@
       </p:sp>
       <p:sp>
         <p:nvSpPr>
-          <p:cNvPr id="16" name="TextBox 15"/>
+          <p:cNvPr id="15" name="TextBox 14"/>
           <p:cNvSpPr txBox="1"/>
           <p:nvPr/>
         </p:nvSpPr>
@@ -8399,6 +7769,14 @@
 <file path=ppt/slides/slide4.xml><?xml version="1.0" encoding="utf-8"?>
 <p:sld xmlns:a="http://schemas.openxmlformats.org/drawingml/2006/main" xmlns:p="http://schemas.openxmlformats.org/presentationml/2006/main" xmlns:r="http://schemas.openxmlformats.org/officeDocument/2006/relationships">
   <p:cSld>
+    <p:bg>
+      <p:bgPr>
+        <a:solidFill>
+          <a:srgbClr val="F6EEE2"/>
+        </a:solidFill>
+        <a:effectLst/>
+      </p:bgPr>
+    </p:bg>
     <p:spTree>
       <p:nvGrpSpPr>
         <p:cNvPr id="1" name=""/>
@@ -8414,49 +7792,6 @@
         </p:nvSpPr>
         <p:spPr>
           <a:xfrm>
-            <a:off x="0" y="0"/>
-            <a:ext cx="12191695" cy="6858000"/>
-          </a:xfrm>
-          <a:prstGeom prst="rect">
-            <a:avLst/>
-          </a:prstGeom>
-          <a:solidFill>
-            <a:srgbClr val="F6EEE2"/>
-          </a:solidFill>
-          <a:ln>
-            <a:noFill/>
-          </a:ln>
-        </p:spPr>
-        <p:style>
-          <a:lnRef idx="1">
-            <a:schemeClr val="accent1"/>
-          </a:lnRef>
-          <a:fillRef idx="3">
-            <a:schemeClr val="accent1"/>
-          </a:fillRef>
-          <a:effectRef idx="2">
-            <a:schemeClr val="accent1"/>
-          </a:effectRef>
-          <a:fontRef idx="minor">
-            <a:schemeClr val="lt1"/>
-          </a:fontRef>
-        </p:style>
-        <p:txBody>
-          <a:bodyPr rtlCol="0" anchor="ctr"/>
-          <a:lstStyle/>
-          <a:p>
-            <a:pPr algn="ctr"/>
-          </a:p>
-        </p:txBody>
-      </p:sp>
-      <p:sp>
-        <p:nvSpPr>
-          <p:cNvPr id="3" name="Rectangle 2"/>
-          <p:cNvSpPr/>
-          <p:nvPr/>
-        </p:nvSpPr>
-        <p:spPr>
-          <a:xfrm>
             <a:off x="548640" y="548640"/>
             <a:ext cx="548640" cy="73152"/>
           </a:xfrm>
@@ -8470,20 +7805,6 @@
             <a:noFill/>
           </a:ln>
         </p:spPr>
-        <p:style>
-          <a:lnRef idx="1">
-            <a:schemeClr val="accent1"/>
-          </a:lnRef>
-          <a:fillRef idx="3">
-            <a:schemeClr val="accent1"/>
-          </a:fillRef>
-          <a:effectRef idx="2">
-            <a:schemeClr val="accent1"/>
-          </a:effectRef>
-          <a:fontRef idx="minor">
-            <a:schemeClr val="lt1"/>
-          </a:fontRef>
-        </p:style>
         <p:txBody>
           <a:bodyPr rtlCol="0" anchor="ctr"/>
           <a:lstStyle/>
@@ -8494,7 +7815,7 @@
       </p:sp>
       <p:sp>
         <p:nvSpPr>
-          <p:cNvPr id="4" name="TextBox 3"/>
+          <p:cNvPr id="3" name="TextBox 2"/>
           <p:cNvSpPr txBox="1"/>
           <p:nvPr/>
         </p:nvSpPr>
@@ -8529,7 +7850,7 @@
       </p:sp>
       <p:sp>
         <p:nvSpPr>
-          <p:cNvPr id="5" name="TextBox 4"/>
+          <p:cNvPr id="4" name="TextBox 3"/>
           <p:cNvSpPr txBox="1"/>
           <p:nvPr/>
         </p:nvSpPr>
@@ -8564,7 +7885,7 @@
       </p:sp>
       <p:sp>
         <p:nvSpPr>
-          <p:cNvPr id="6" name="Rounded Rectangle 5"/>
+          <p:cNvPr id="5" name="Rounded Rectangle 4"/>
           <p:cNvSpPr/>
           <p:nvPr/>
         </p:nvSpPr>
@@ -8585,20 +7906,6 @@
             <a:noFill/>
           </a:ln>
         </p:spPr>
-        <p:style>
-          <a:lnRef idx="1">
-            <a:schemeClr val="accent1"/>
-          </a:lnRef>
-          <a:fillRef idx="3">
-            <a:schemeClr val="accent1"/>
-          </a:fillRef>
-          <a:effectRef idx="2">
-            <a:schemeClr val="accent1"/>
-          </a:effectRef>
-          <a:fontRef idx="minor">
-            <a:schemeClr val="lt1"/>
-          </a:fontRef>
-        </p:style>
         <p:txBody>
           <a:bodyPr rtlCol="0" anchor="ctr"/>
           <a:lstStyle/>
@@ -8609,7 +7916,7 @@
       </p:sp>
       <p:sp>
         <p:nvSpPr>
-          <p:cNvPr id="7" name="Rounded Rectangle 6"/>
+          <p:cNvPr id="6" name="Rounded Rectangle 5"/>
           <p:cNvSpPr/>
           <p:nvPr/>
         </p:nvSpPr>
@@ -8630,20 +7937,6 @@
             <a:noFill/>
           </a:ln>
         </p:spPr>
-        <p:style>
-          <a:lnRef idx="1">
-            <a:schemeClr val="accent1"/>
-          </a:lnRef>
-          <a:fillRef idx="3">
-            <a:schemeClr val="accent1"/>
-          </a:fillRef>
-          <a:effectRef idx="2">
-            <a:schemeClr val="accent1"/>
-          </a:effectRef>
-          <a:fontRef idx="minor">
-            <a:schemeClr val="lt1"/>
-          </a:fontRef>
-        </p:style>
         <p:txBody>
           <a:bodyPr rtlCol="0" anchor="ctr"/>
           <a:lstStyle/>
@@ -8654,7 +7947,7 @@
       </p:sp>
       <p:sp>
         <p:nvSpPr>
-          <p:cNvPr id="8" name="TextBox 7"/>
+          <p:cNvPr id="7" name="TextBox 6"/>
           <p:cNvSpPr txBox="1"/>
           <p:nvPr/>
         </p:nvSpPr>
@@ -8689,7 +7982,7 @@
       </p:sp>
       <p:sp>
         <p:nvSpPr>
-          <p:cNvPr id="9" name="TextBox 8"/>
+          <p:cNvPr id="8" name="TextBox 7"/>
           <p:cNvSpPr txBox="1"/>
           <p:nvPr/>
         </p:nvSpPr>
@@ -8760,7 +8053,7 @@
       </p:sp>
       <p:sp>
         <p:nvSpPr>
-          <p:cNvPr id="10" name="Rounded Rectangle 9"/>
+          <p:cNvPr id="9" name="Rounded Rectangle 8"/>
           <p:cNvSpPr/>
           <p:nvPr/>
         </p:nvSpPr>
@@ -8781,20 +8074,6 @@
             <a:noFill/>
           </a:ln>
         </p:spPr>
-        <p:style>
-          <a:lnRef idx="1">
-            <a:schemeClr val="accent1"/>
-          </a:lnRef>
-          <a:fillRef idx="3">
-            <a:schemeClr val="accent1"/>
-          </a:fillRef>
-          <a:effectRef idx="2">
-            <a:schemeClr val="accent1"/>
-          </a:effectRef>
-          <a:fontRef idx="minor">
-            <a:schemeClr val="lt1"/>
-          </a:fontRef>
-        </p:style>
         <p:txBody>
           <a:bodyPr rtlCol="0" anchor="ctr"/>
           <a:lstStyle/>
@@ -8805,7 +8084,7 @@
       </p:sp>
       <p:sp>
         <p:nvSpPr>
-          <p:cNvPr id="11" name="Rounded Rectangle 10"/>
+          <p:cNvPr id="10" name="Rounded Rectangle 9"/>
           <p:cNvSpPr/>
           <p:nvPr/>
         </p:nvSpPr>
@@ -8826,20 +8105,6 @@
             <a:noFill/>
           </a:ln>
         </p:spPr>
-        <p:style>
-          <a:lnRef idx="1">
-            <a:schemeClr val="accent1"/>
-          </a:lnRef>
-          <a:fillRef idx="3">
-            <a:schemeClr val="accent1"/>
-          </a:fillRef>
-          <a:effectRef idx="2">
-            <a:schemeClr val="accent1"/>
-          </a:effectRef>
-          <a:fontRef idx="minor">
-            <a:schemeClr val="lt1"/>
-          </a:fontRef>
-        </p:style>
         <p:txBody>
           <a:bodyPr rtlCol="0" anchor="ctr"/>
           <a:lstStyle/>
@@ -8850,7 +8115,7 @@
       </p:sp>
       <p:sp>
         <p:nvSpPr>
-          <p:cNvPr id="12" name="TextBox 11"/>
+          <p:cNvPr id="11" name="TextBox 10"/>
           <p:cNvSpPr txBox="1"/>
           <p:nvPr/>
         </p:nvSpPr>
@@ -8885,7 +8150,7 @@
       </p:sp>
       <p:sp>
         <p:nvSpPr>
-          <p:cNvPr id="13" name="TextBox 12"/>
+          <p:cNvPr id="12" name="TextBox 11"/>
           <p:cNvSpPr txBox="1"/>
           <p:nvPr/>
         </p:nvSpPr>
@@ -8956,7 +8221,7 @@
       </p:sp>
       <p:sp>
         <p:nvSpPr>
-          <p:cNvPr id="14" name="Rounded Rectangle 13"/>
+          <p:cNvPr id="13" name="Rounded Rectangle 12"/>
           <p:cNvSpPr/>
           <p:nvPr/>
         </p:nvSpPr>
@@ -8977,20 +8242,6 @@
             <a:noFill/>
           </a:ln>
         </p:spPr>
-        <p:style>
-          <a:lnRef idx="1">
-            <a:schemeClr val="accent1"/>
-          </a:lnRef>
-          <a:fillRef idx="3">
-            <a:schemeClr val="accent1"/>
-          </a:fillRef>
-          <a:effectRef idx="2">
-            <a:schemeClr val="accent1"/>
-          </a:effectRef>
-          <a:fontRef idx="minor">
-            <a:schemeClr val="lt1"/>
-          </a:fontRef>
-        </p:style>
         <p:txBody>
           <a:bodyPr rtlCol="0" anchor="ctr"/>
           <a:lstStyle/>
@@ -9001,7 +8252,7 @@
       </p:sp>
       <p:sp>
         <p:nvSpPr>
-          <p:cNvPr id="15" name="Rounded Rectangle 14"/>
+          <p:cNvPr id="14" name="Rounded Rectangle 13"/>
           <p:cNvSpPr/>
           <p:nvPr/>
         </p:nvSpPr>
@@ -9022,20 +8273,6 @@
             <a:noFill/>
           </a:ln>
         </p:spPr>
-        <p:style>
-          <a:lnRef idx="1">
-            <a:schemeClr val="accent1"/>
-          </a:lnRef>
-          <a:fillRef idx="3">
-            <a:schemeClr val="accent1"/>
-          </a:fillRef>
-          <a:effectRef idx="2">
-            <a:schemeClr val="accent1"/>
-          </a:effectRef>
-          <a:fontRef idx="minor">
-            <a:schemeClr val="lt1"/>
-          </a:fontRef>
-        </p:style>
         <p:txBody>
           <a:bodyPr rtlCol="0" anchor="ctr"/>
           <a:lstStyle/>
@@ -9046,7 +8283,7 @@
       </p:sp>
       <p:sp>
         <p:nvSpPr>
-          <p:cNvPr id="16" name="TextBox 15"/>
+          <p:cNvPr id="15" name="TextBox 14"/>
           <p:cNvSpPr txBox="1"/>
           <p:nvPr/>
         </p:nvSpPr>
@@ -9081,7 +8318,7 @@
       </p:sp>
       <p:sp>
         <p:nvSpPr>
-          <p:cNvPr id="17" name="TextBox 16"/>
+          <p:cNvPr id="16" name="TextBox 15"/>
           <p:cNvSpPr txBox="1"/>
           <p:nvPr/>
         </p:nvSpPr>
@@ -9152,7 +8389,7 @@
       </p:sp>
       <p:sp>
         <p:nvSpPr>
-          <p:cNvPr id="18" name="Rounded Rectangle 17"/>
+          <p:cNvPr id="17" name="Rounded Rectangle 16"/>
           <p:cNvSpPr/>
           <p:nvPr/>
         </p:nvSpPr>
@@ -9173,20 +8410,6 @@
             <a:noFill/>
           </a:ln>
         </p:spPr>
-        <p:style>
-          <a:lnRef idx="1">
-            <a:schemeClr val="accent1"/>
-          </a:lnRef>
-          <a:fillRef idx="3">
-            <a:schemeClr val="accent1"/>
-          </a:fillRef>
-          <a:effectRef idx="2">
-            <a:schemeClr val="accent1"/>
-          </a:effectRef>
-          <a:fontRef idx="minor">
-            <a:schemeClr val="lt1"/>
-          </a:fontRef>
-        </p:style>
         <p:txBody>
           <a:bodyPr rtlCol="0" anchor="ctr"/>
           <a:lstStyle/>
@@ -9197,7 +8420,7 @@
       </p:sp>
       <p:sp>
         <p:nvSpPr>
-          <p:cNvPr id="19" name="Rounded Rectangle 18"/>
+          <p:cNvPr id="18" name="Rounded Rectangle 17"/>
           <p:cNvSpPr/>
           <p:nvPr/>
         </p:nvSpPr>
@@ -9218,20 +8441,6 @@
             <a:noFill/>
           </a:ln>
         </p:spPr>
-        <p:style>
-          <a:lnRef idx="1">
-            <a:schemeClr val="accent1"/>
-          </a:lnRef>
-          <a:fillRef idx="3">
-            <a:schemeClr val="accent1"/>
-          </a:fillRef>
-          <a:effectRef idx="2">
-            <a:schemeClr val="accent1"/>
-          </a:effectRef>
-          <a:fontRef idx="minor">
-            <a:schemeClr val="lt1"/>
-          </a:fontRef>
-        </p:style>
         <p:txBody>
           <a:bodyPr rtlCol="0" anchor="ctr"/>
           <a:lstStyle/>
@@ -9242,7 +8451,7 @@
       </p:sp>
       <p:sp>
         <p:nvSpPr>
-          <p:cNvPr id="20" name="TextBox 19"/>
+          <p:cNvPr id="19" name="TextBox 18"/>
           <p:cNvSpPr txBox="1"/>
           <p:nvPr/>
         </p:nvSpPr>
@@ -9277,7 +8486,7 @@
       </p:sp>
       <p:sp>
         <p:nvSpPr>
-          <p:cNvPr id="21" name="TextBox 20"/>
+          <p:cNvPr id="20" name="TextBox 19"/>
           <p:cNvSpPr txBox="1"/>
           <p:nvPr/>
         </p:nvSpPr>
@@ -9348,7 +8557,7 @@
       </p:sp>
       <p:sp>
         <p:nvSpPr>
-          <p:cNvPr id="22" name="TextBox 21"/>
+          <p:cNvPr id="21" name="TextBox 20"/>
           <p:cNvSpPr txBox="1"/>
           <p:nvPr/>
         </p:nvSpPr>
@@ -9383,7 +8592,7 @@
       </p:sp>
       <p:sp>
         <p:nvSpPr>
-          <p:cNvPr id="23" name="TextBox 22"/>
+          <p:cNvPr id="22" name="TextBox 21"/>
           <p:cNvSpPr txBox="1"/>
           <p:nvPr/>
         </p:nvSpPr>
@@ -9427,6 +8636,14 @@
 <file path=ppt/slides/slide5.xml><?xml version="1.0" encoding="utf-8"?>
 <p:sld xmlns:a="http://schemas.openxmlformats.org/drawingml/2006/main" xmlns:p="http://schemas.openxmlformats.org/presentationml/2006/main" xmlns:r="http://schemas.openxmlformats.org/officeDocument/2006/relationships">
   <p:cSld>
+    <p:bg>
+      <p:bgPr>
+        <a:solidFill>
+          <a:srgbClr val="F6EEE2"/>
+        </a:solidFill>
+        <a:effectLst/>
+      </p:bgPr>
+    </p:bg>
     <p:spTree>
       <p:nvGrpSpPr>
         <p:cNvPr id="1" name=""/>
@@ -9442,49 +8659,6 @@
         </p:nvSpPr>
         <p:spPr>
           <a:xfrm>
-            <a:off x="0" y="0"/>
-            <a:ext cx="12191695" cy="6858000"/>
-          </a:xfrm>
-          <a:prstGeom prst="rect">
-            <a:avLst/>
-          </a:prstGeom>
-          <a:solidFill>
-            <a:srgbClr val="F6EEE2"/>
-          </a:solidFill>
-          <a:ln>
-            <a:noFill/>
-          </a:ln>
-        </p:spPr>
-        <p:style>
-          <a:lnRef idx="1">
-            <a:schemeClr val="accent1"/>
-          </a:lnRef>
-          <a:fillRef idx="3">
-            <a:schemeClr val="accent1"/>
-          </a:fillRef>
-          <a:effectRef idx="2">
-            <a:schemeClr val="accent1"/>
-          </a:effectRef>
-          <a:fontRef idx="minor">
-            <a:schemeClr val="lt1"/>
-          </a:fontRef>
-        </p:style>
-        <p:txBody>
-          <a:bodyPr rtlCol="0" anchor="ctr"/>
-          <a:lstStyle/>
-          <a:p>
-            <a:pPr algn="ctr"/>
-          </a:p>
-        </p:txBody>
-      </p:sp>
-      <p:sp>
-        <p:nvSpPr>
-          <p:cNvPr id="3" name="Rectangle 2"/>
-          <p:cNvSpPr/>
-          <p:nvPr/>
-        </p:nvSpPr>
-        <p:spPr>
-          <a:xfrm>
             <a:off x="548640" y="548640"/>
             <a:ext cx="548640" cy="73152"/>
           </a:xfrm>
@@ -9498,20 +8672,6 @@
             <a:noFill/>
           </a:ln>
         </p:spPr>
-        <p:style>
-          <a:lnRef idx="1">
-            <a:schemeClr val="accent1"/>
-          </a:lnRef>
-          <a:fillRef idx="3">
-            <a:schemeClr val="accent1"/>
-          </a:fillRef>
-          <a:effectRef idx="2">
-            <a:schemeClr val="accent1"/>
-          </a:effectRef>
-          <a:fontRef idx="minor">
-            <a:schemeClr val="lt1"/>
-          </a:fontRef>
-        </p:style>
         <p:txBody>
           <a:bodyPr rtlCol="0" anchor="ctr"/>
           <a:lstStyle/>
@@ -9522,7 +8682,7 @@
       </p:sp>
       <p:sp>
         <p:nvSpPr>
-          <p:cNvPr id="4" name="TextBox 3"/>
+          <p:cNvPr id="3" name="TextBox 2"/>
           <p:cNvSpPr txBox="1"/>
           <p:nvPr/>
         </p:nvSpPr>
@@ -9557,7 +8717,7 @@
       </p:sp>
       <p:sp>
         <p:nvSpPr>
-          <p:cNvPr id="5" name="TextBox 4"/>
+          <p:cNvPr id="4" name="TextBox 3"/>
           <p:cNvSpPr txBox="1"/>
           <p:nvPr/>
         </p:nvSpPr>
@@ -9592,7 +8752,7 @@
       </p:sp>
       <p:sp>
         <p:nvSpPr>
-          <p:cNvPr id="6" name="TextBox 5"/>
+          <p:cNvPr id="5" name="TextBox 4"/>
           <p:cNvSpPr txBox="1"/>
           <p:nvPr/>
         </p:nvSpPr>
@@ -9627,7 +8787,7 @@
       </p:sp>
       <p:sp>
         <p:nvSpPr>
-          <p:cNvPr id="7" name="TextBox 6"/>
+          <p:cNvPr id="6" name="TextBox 5"/>
           <p:cNvSpPr txBox="1"/>
           <p:nvPr/>
         </p:nvSpPr>
@@ -9662,7 +8822,7 @@
       </p:sp>
       <p:sp>
         <p:nvSpPr>
-          <p:cNvPr id="8" name="TextBox 7"/>
+          <p:cNvPr id="7" name="TextBox 6"/>
           <p:cNvSpPr txBox="1"/>
           <p:nvPr/>
         </p:nvSpPr>
@@ -9697,7 +8857,7 @@
       </p:sp>
       <p:sp>
         <p:nvSpPr>
-          <p:cNvPr id="9" name="TextBox 8"/>
+          <p:cNvPr id="8" name="TextBox 7"/>
           <p:cNvSpPr txBox="1"/>
           <p:nvPr/>
         </p:nvSpPr>
@@ -9732,7 +8892,7 @@
       </p:sp>
       <p:sp>
         <p:nvSpPr>
-          <p:cNvPr id="10" name="TextBox 9"/>
+          <p:cNvPr id="9" name="TextBox 8"/>
           <p:cNvSpPr txBox="1"/>
           <p:nvPr/>
         </p:nvSpPr>
@@ -9767,7 +8927,7 @@
       </p:sp>
       <p:sp>
         <p:nvSpPr>
-          <p:cNvPr id="11" name="TextBox 10"/>
+          <p:cNvPr id="10" name="TextBox 9"/>
           <p:cNvSpPr txBox="1"/>
           <p:nvPr/>
         </p:nvSpPr>
@@ -9802,7 +8962,7 @@
       </p:sp>
       <p:sp>
         <p:nvSpPr>
-          <p:cNvPr id="12" name="TextBox 11"/>
+          <p:cNvPr id="11" name="TextBox 10"/>
           <p:cNvSpPr txBox="1"/>
           <p:nvPr/>
         </p:nvSpPr>
@@ -9837,7 +8997,7 @@
       </p:sp>
       <p:sp>
         <p:nvSpPr>
-          <p:cNvPr id="13" name="TextBox 12"/>
+          <p:cNvPr id="12" name="TextBox 11"/>
           <p:cNvSpPr txBox="1"/>
           <p:nvPr/>
         </p:nvSpPr>
@@ -9872,7 +9032,7 @@
       </p:sp>
       <p:sp>
         <p:nvSpPr>
-          <p:cNvPr id="14" name="TextBox 13"/>
+          <p:cNvPr id="13" name="TextBox 12"/>
           <p:cNvSpPr txBox="1"/>
           <p:nvPr/>
         </p:nvSpPr>
@@ -9907,7 +9067,7 @@
       </p:sp>
       <p:sp>
         <p:nvSpPr>
-          <p:cNvPr id="15" name="TextBox 14"/>
+          <p:cNvPr id="14" name="TextBox 13"/>
           <p:cNvSpPr txBox="1"/>
           <p:nvPr/>
         </p:nvSpPr>
@@ -9942,7 +9102,7 @@
       </p:sp>
       <p:sp>
         <p:nvSpPr>
-          <p:cNvPr id="16" name="TextBox 15"/>
+          <p:cNvPr id="15" name="TextBox 14"/>
           <p:cNvSpPr txBox="1"/>
           <p:nvPr/>
         </p:nvSpPr>
@@ -9977,7 +9137,7 @@
       </p:sp>
       <p:sp>
         <p:nvSpPr>
-          <p:cNvPr id="17" name="TextBox 16"/>
+          <p:cNvPr id="16" name="TextBox 15"/>
           <p:cNvSpPr txBox="1"/>
           <p:nvPr/>
         </p:nvSpPr>
@@ -10012,7 +9172,7 @@
       </p:sp>
       <p:sp>
         <p:nvSpPr>
-          <p:cNvPr id="18" name="TextBox 17"/>
+          <p:cNvPr id="17" name="TextBox 16"/>
           <p:cNvSpPr txBox="1"/>
           <p:nvPr/>
         </p:nvSpPr>
@@ -10047,7 +9207,7 @@
       </p:sp>
       <p:sp>
         <p:nvSpPr>
-          <p:cNvPr id="19" name="TextBox 18"/>
+          <p:cNvPr id="18" name="TextBox 17"/>
           <p:cNvSpPr txBox="1"/>
           <p:nvPr/>
         </p:nvSpPr>
@@ -10082,7 +9242,7 @@
       </p:sp>
       <p:sp>
         <p:nvSpPr>
-          <p:cNvPr id="20" name="TextBox 19"/>
+          <p:cNvPr id="19" name="TextBox 18"/>
           <p:cNvSpPr txBox="1"/>
           <p:nvPr/>
         </p:nvSpPr>
@@ -10117,7 +9277,7 @@
       </p:sp>
       <p:sp>
         <p:nvSpPr>
-          <p:cNvPr id="21" name="TextBox 20"/>
+          <p:cNvPr id="20" name="TextBox 19"/>
           <p:cNvSpPr txBox="1"/>
           <p:nvPr/>
         </p:nvSpPr>
@@ -10152,7 +9312,7 @@
       </p:sp>
       <p:sp>
         <p:nvSpPr>
-          <p:cNvPr id="22" name="TextBox 21"/>
+          <p:cNvPr id="21" name="TextBox 20"/>
           <p:cNvSpPr txBox="1"/>
           <p:nvPr/>
         </p:nvSpPr>
@@ -10187,7 +9347,7 @@
       </p:sp>
       <p:sp>
         <p:nvSpPr>
-          <p:cNvPr id="23" name="TextBox 22"/>
+          <p:cNvPr id="22" name="TextBox 21"/>
           <p:cNvSpPr txBox="1"/>
           <p:nvPr/>
         </p:nvSpPr>
@@ -10222,7 +9382,7 @@
       </p:sp>
       <p:sp>
         <p:nvSpPr>
-          <p:cNvPr id="24" name="TextBox 23"/>
+          <p:cNvPr id="23" name="TextBox 22"/>
           <p:cNvSpPr txBox="1"/>
           <p:nvPr/>
         </p:nvSpPr>
@@ -10257,7 +9417,7 @@
       </p:sp>
       <p:sp>
         <p:nvSpPr>
-          <p:cNvPr id="25" name="TextBox 24"/>
+          <p:cNvPr id="24" name="TextBox 23"/>
           <p:cNvSpPr txBox="1"/>
           <p:nvPr/>
         </p:nvSpPr>
@@ -10292,7 +9452,7 @@
       </p:sp>
       <p:sp>
         <p:nvSpPr>
-          <p:cNvPr id="26" name="TextBox 25"/>
+          <p:cNvPr id="25" name="TextBox 24"/>
           <p:cNvSpPr txBox="1"/>
           <p:nvPr/>
         </p:nvSpPr>
@@ -10327,7 +9487,7 @@
       </p:sp>
       <p:sp>
         <p:nvSpPr>
-          <p:cNvPr id="27" name="TextBox 26"/>
+          <p:cNvPr id="26" name="TextBox 25"/>
           <p:cNvSpPr txBox="1"/>
           <p:nvPr/>
         </p:nvSpPr>
@@ -10362,7 +9522,7 @@
       </p:sp>
       <p:sp>
         <p:nvSpPr>
-          <p:cNvPr id="28" name="TextBox 27"/>
+          <p:cNvPr id="27" name="TextBox 26"/>
           <p:cNvSpPr txBox="1"/>
           <p:nvPr/>
         </p:nvSpPr>
@@ -10406,6 +9566,14 @@
 <file path=ppt/slides/slide6.xml><?xml version="1.0" encoding="utf-8"?>
 <p:sld xmlns:a="http://schemas.openxmlformats.org/drawingml/2006/main" xmlns:p="http://schemas.openxmlformats.org/presentationml/2006/main" xmlns:r="http://schemas.openxmlformats.org/officeDocument/2006/relationships">
   <p:cSld>
+    <p:bg>
+      <p:bgPr>
+        <a:solidFill>
+          <a:srgbClr val="F6EEE2"/>
+        </a:solidFill>
+        <a:effectLst/>
+      </p:bgPr>
+    </p:bg>
     <p:spTree>
       <p:nvGrpSpPr>
         <p:cNvPr id="1" name=""/>
@@ -10421,49 +9589,6 @@
         </p:nvSpPr>
         <p:spPr>
           <a:xfrm>
-            <a:off x="0" y="0"/>
-            <a:ext cx="12191695" cy="6858000"/>
-          </a:xfrm>
-          <a:prstGeom prst="rect">
-            <a:avLst/>
-          </a:prstGeom>
-          <a:solidFill>
-            <a:srgbClr val="F6EEE2"/>
-          </a:solidFill>
-          <a:ln>
-            <a:noFill/>
-          </a:ln>
-        </p:spPr>
-        <p:style>
-          <a:lnRef idx="1">
-            <a:schemeClr val="accent1"/>
-          </a:lnRef>
-          <a:fillRef idx="3">
-            <a:schemeClr val="accent1"/>
-          </a:fillRef>
-          <a:effectRef idx="2">
-            <a:schemeClr val="accent1"/>
-          </a:effectRef>
-          <a:fontRef idx="minor">
-            <a:schemeClr val="lt1"/>
-          </a:fontRef>
-        </p:style>
-        <p:txBody>
-          <a:bodyPr rtlCol="0" anchor="ctr"/>
-          <a:lstStyle/>
-          <a:p>
-            <a:pPr algn="ctr"/>
-          </a:p>
-        </p:txBody>
-      </p:sp>
-      <p:sp>
-        <p:nvSpPr>
-          <p:cNvPr id="3" name="Rectangle 2"/>
-          <p:cNvSpPr/>
-          <p:nvPr/>
-        </p:nvSpPr>
-        <p:spPr>
-          <a:xfrm>
             <a:off x="548640" y="548640"/>
             <a:ext cx="548640" cy="73152"/>
           </a:xfrm>
@@ -10477,20 +9602,6 @@
             <a:noFill/>
           </a:ln>
         </p:spPr>
-        <p:style>
-          <a:lnRef idx="1">
-            <a:schemeClr val="accent1"/>
-          </a:lnRef>
-          <a:fillRef idx="3">
-            <a:schemeClr val="accent1"/>
-          </a:fillRef>
-          <a:effectRef idx="2">
-            <a:schemeClr val="accent1"/>
-          </a:effectRef>
-          <a:fontRef idx="minor">
-            <a:schemeClr val="lt1"/>
-          </a:fontRef>
-        </p:style>
         <p:txBody>
           <a:bodyPr rtlCol="0" anchor="ctr"/>
           <a:lstStyle/>
@@ -10501,7 +9612,7 @@
       </p:sp>
       <p:sp>
         <p:nvSpPr>
-          <p:cNvPr id="4" name="TextBox 3"/>
+          <p:cNvPr id="3" name="TextBox 2"/>
           <p:cNvSpPr txBox="1"/>
           <p:nvPr/>
         </p:nvSpPr>
@@ -10536,7 +9647,7 @@
       </p:sp>
       <p:sp>
         <p:nvSpPr>
-          <p:cNvPr id="5" name="TextBox 4"/>
+          <p:cNvPr id="4" name="TextBox 3"/>
           <p:cNvSpPr txBox="1"/>
           <p:nvPr/>
         </p:nvSpPr>
@@ -10571,7 +9682,7 @@
       </p:sp>
       <p:sp>
         <p:nvSpPr>
-          <p:cNvPr id="6" name="Oval 5"/>
+          <p:cNvPr id="5" name="Oval 4"/>
           <p:cNvSpPr/>
           <p:nvPr/>
         </p:nvSpPr>
@@ -10590,20 +9701,6 @@
             <a:noFill/>
           </a:ln>
         </p:spPr>
-        <p:style>
-          <a:lnRef idx="1">
-            <a:schemeClr val="accent1"/>
-          </a:lnRef>
-          <a:fillRef idx="3">
-            <a:schemeClr val="accent1"/>
-          </a:fillRef>
-          <a:effectRef idx="2">
-            <a:schemeClr val="accent1"/>
-          </a:effectRef>
-          <a:fontRef idx="minor">
-            <a:schemeClr val="lt1"/>
-          </a:fontRef>
-        </p:style>
         <p:txBody>
           <a:bodyPr rtlCol="0" anchor="ctr"/>
           <a:lstStyle/>
@@ -10614,7 +9711,7 @@
       </p:sp>
       <p:sp>
         <p:nvSpPr>
-          <p:cNvPr id="7" name="TextBox 6"/>
+          <p:cNvPr id="6" name="TextBox 5"/>
           <p:cNvSpPr txBox="1"/>
           <p:nvPr/>
         </p:nvSpPr>
@@ -10649,7 +9746,7 @@
       </p:sp>
       <p:sp>
         <p:nvSpPr>
-          <p:cNvPr id="8" name="TextBox 7"/>
+          <p:cNvPr id="7" name="TextBox 6"/>
           <p:cNvSpPr txBox="1"/>
           <p:nvPr/>
         </p:nvSpPr>
@@ -10684,7 +9781,7 @@
       </p:sp>
       <p:sp>
         <p:nvSpPr>
-          <p:cNvPr id="9" name="Oval 8"/>
+          <p:cNvPr id="8" name="Oval 7"/>
           <p:cNvSpPr/>
           <p:nvPr/>
         </p:nvSpPr>
@@ -10703,20 +9800,6 @@
             <a:noFill/>
           </a:ln>
         </p:spPr>
-        <p:style>
-          <a:lnRef idx="1">
-            <a:schemeClr val="accent1"/>
-          </a:lnRef>
-          <a:fillRef idx="3">
-            <a:schemeClr val="accent1"/>
-          </a:fillRef>
-          <a:effectRef idx="2">
-            <a:schemeClr val="accent1"/>
-          </a:effectRef>
-          <a:fontRef idx="minor">
-            <a:schemeClr val="lt1"/>
-          </a:fontRef>
-        </p:style>
         <p:txBody>
           <a:bodyPr rtlCol="0" anchor="ctr"/>
           <a:lstStyle/>
@@ -10727,7 +9810,7 @@
       </p:sp>
       <p:sp>
         <p:nvSpPr>
-          <p:cNvPr id="10" name="TextBox 9"/>
+          <p:cNvPr id="9" name="TextBox 8"/>
           <p:cNvSpPr txBox="1"/>
           <p:nvPr/>
         </p:nvSpPr>
@@ -10762,7 +9845,7 @@
       </p:sp>
       <p:sp>
         <p:nvSpPr>
-          <p:cNvPr id="11" name="TextBox 10"/>
+          <p:cNvPr id="10" name="TextBox 9"/>
           <p:cNvSpPr txBox="1"/>
           <p:nvPr/>
         </p:nvSpPr>
@@ -10797,7 +9880,7 @@
       </p:sp>
       <p:sp>
         <p:nvSpPr>
-          <p:cNvPr id="12" name="Oval 11"/>
+          <p:cNvPr id="11" name="Oval 10"/>
           <p:cNvSpPr/>
           <p:nvPr/>
         </p:nvSpPr>
@@ -10816,20 +9899,6 @@
             <a:noFill/>
           </a:ln>
         </p:spPr>
-        <p:style>
-          <a:lnRef idx="1">
-            <a:schemeClr val="accent1"/>
-          </a:lnRef>
-          <a:fillRef idx="3">
-            <a:schemeClr val="accent1"/>
-          </a:fillRef>
-          <a:effectRef idx="2">
-            <a:schemeClr val="accent1"/>
-          </a:effectRef>
-          <a:fontRef idx="minor">
-            <a:schemeClr val="lt1"/>
-          </a:fontRef>
-        </p:style>
         <p:txBody>
           <a:bodyPr rtlCol="0" anchor="ctr"/>
           <a:lstStyle/>
@@ -10840,7 +9909,7 @@
       </p:sp>
       <p:sp>
         <p:nvSpPr>
-          <p:cNvPr id="13" name="TextBox 12"/>
+          <p:cNvPr id="12" name="TextBox 11"/>
           <p:cNvSpPr txBox="1"/>
           <p:nvPr/>
         </p:nvSpPr>
@@ -10875,7 +9944,7 @@
       </p:sp>
       <p:sp>
         <p:nvSpPr>
-          <p:cNvPr id="14" name="TextBox 13"/>
+          <p:cNvPr id="13" name="TextBox 12"/>
           <p:cNvSpPr txBox="1"/>
           <p:nvPr/>
         </p:nvSpPr>
@@ -10910,7 +9979,7 @@
       </p:sp>
       <p:sp>
         <p:nvSpPr>
-          <p:cNvPr id="15" name="Oval 14"/>
+          <p:cNvPr id="14" name="Oval 13"/>
           <p:cNvSpPr/>
           <p:nvPr/>
         </p:nvSpPr>
@@ -10929,20 +9998,6 @@
             <a:noFill/>
           </a:ln>
         </p:spPr>
-        <p:style>
-          <a:lnRef idx="1">
-            <a:schemeClr val="accent1"/>
-          </a:lnRef>
-          <a:fillRef idx="3">
-            <a:schemeClr val="accent1"/>
-          </a:fillRef>
-          <a:effectRef idx="2">
-            <a:schemeClr val="accent1"/>
-          </a:effectRef>
-          <a:fontRef idx="minor">
-            <a:schemeClr val="lt1"/>
-          </a:fontRef>
-        </p:style>
         <p:txBody>
           <a:bodyPr rtlCol="0" anchor="ctr"/>
           <a:lstStyle/>
@@ -10953,7 +10008,7 @@
       </p:sp>
       <p:sp>
         <p:nvSpPr>
-          <p:cNvPr id="16" name="TextBox 15"/>
+          <p:cNvPr id="15" name="TextBox 14"/>
           <p:cNvSpPr txBox="1"/>
           <p:nvPr/>
         </p:nvSpPr>
@@ -10988,7 +10043,7 @@
       </p:sp>
       <p:sp>
         <p:nvSpPr>
-          <p:cNvPr id="17" name="TextBox 16"/>
+          <p:cNvPr id="16" name="TextBox 15"/>
           <p:cNvSpPr txBox="1"/>
           <p:nvPr/>
         </p:nvSpPr>
@@ -11023,7 +10078,7 @@
       </p:sp>
       <p:sp>
         <p:nvSpPr>
-          <p:cNvPr id="18" name="Oval 17"/>
+          <p:cNvPr id="17" name="Oval 16"/>
           <p:cNvSpPr/>
           <p:nvPr/>
         </p:nvSpPr>
@@ -11042,20 +10097,6 @@
             <a:noFill/>
           </a:ln>
         </p:spPr>
-        <p:style>
-          <a:lnRef idx="1">
-            <a:schemeClr val="accent1"/>
-          </a:lnRef>
-          <a:fillRef idx="3">
-            <a:schemeClr val="accent1"/>
-          </a:fillRef>
-          <a:effectRef idx="2">
-            <a:schemeClr val="accent1"/>
-          </a:effectRef>
-          <a:fontRef idx="minor">
-            <a:schemeClr val="lt1"/>
-          </a:fontRef>
-        </p:style>
         <p:txBody>
           <a:bodyPr rtlCol="0" anchor="ctr"/>
           <a:lstStyle/>
@@ -11066,7 +10107,7 @@
       </p:sp>
       <p:sp>
         <p:nvSpPr>
-          <p:cNvPr id="19" name="TextBox 18"/>
+          <p:cNvPr id="18" name="TextBox 17"/>
           <p:cNvSpPr txBox="1"/>
           <p:nvPr/>
         </p:nvSpPr>
@@ -11101,7 +10142,7 @@
       </p:sp>
       <p:sp>
         <p:nvSpPr>
-          <p:cNvPr id="20" name="TextBox 19"/>
+          <p:cNvPr id="19" name="TextBox 18"/>
           <p:cNvSpPr txBox="1"/>
           <p:nvPr/>
         </p:nvSpPr>
@@ -11136,7 +10177,7 @@
       </p:sp>
       <p:sp>
         <p:nvSpPr>
-          <p:cNvPr id="21" name="Oval 20"/>
+          <p:cNvPr id="20" name="Oval 19"/>
           <p:cNvSpPr/>
           <p:nvPr/>
         </p:nvSpPr>
@@ -11155,20 +10196,6 @@
             <a:noFill/>
           </a:ln>
         </p:spPr>
-        <p:style>
-          <a:lnRef idx="1">
-            <a:schemeClr val="accent1"/>
-          </a:lnRef>
-          <a:fillRef idx="3">
-            <a:schemeClr val="accent1"/>
-          </a:fillRef>
-          <a:effectRef idx="2">
-            <a:schemeClr val="accent1"/>
-          </a:effectRef>
-          <a:fontRef idx="minor">
-            <a:schemeClr val="lt1"/>
-          </a:fontRef>
-        </p:style>
         <p:txBody>
           <a:bodyPr rtlCol="0" anchor="ctr"/>
           <a:lstStyle/>
@@ -11179,7 +10206,7 @@
       </p:sp>
       <p:sp>
         <p:nvSpPr>
-          <p:cNvPr id="22" name="TextBox 21"/>
+          <p:cNvPr id="21" name="TextBox 20"/>
           <p:cNvSpPr txBox="1"/>
           <p:nvPr/>
         </p:nvSpPr>
@@ -11214,7 +10241,7 @@
       </p:sp>
       <p:sp>
         <p:nvSpPr>
-          <p:cNvPr id="23" name="TextBox 22"/>
+          <p:cNvPr id="22" name="TextBox 21"/>
           <p:cNvSpPr txBox="1"/>
           <p:nvPr/>
         </p:nvSpPr>
@@ -11249,7 +10276,7 @@
       </p:sp>
       <p:sp>
         <p:nvSpPr>
-          <p:cNvPr id="24" name="Oval 23"/>
+          <p:cNvPr id="23" name="Oval 22"/>
           <p:cNvSpPr/>
           <p:nvPr/>
         </p:nvSpPr>
@@ -11268,20 +10295,6 @@
             <a:noFill/>
           </a:ln>
         </p:spPr>
-        <p:style>
-          <a:lnRef idx="1">
-            <a:schemeClr val="accent1"/>
-          </a:lnRef>
-          <a:fillRef idx="3">
-            <a:schemeClr val="accent1"/>
-          </a:fillRef>
-          <a:effectRef idx="2">
-            <a:schemeClr val="accent1"/>
-          </a:effectRef>
-          <a:fontRef idx="minor">
-            <a:schemeClr val="lt1"/>
-          </a:fontRef>
-        </p:style>
         <p:txBody>
           <a:bodyPr rtlCol="0" anchor="ctr"/>
           <a:lstStyle/>
@@ -11292,7 +10305,7 @@
       </p:sp>
       <p:sp>
         <p:nvSpPr>
-          <p:cNvPr id="25" name="TextBox 24"/>
+          <p:cNvPr id="24" name="TextBox 23"/>
           <p:cNvSpPr txBox="1"/>
           <p:nvPr/>
         </p:nvSpPr>
@@ -11327,7 +10340,7 @@
       </p:sp>
       <p:sp>
         <p:nvSpPr>
-          <p:cNvPr id="26" name="TextBox 25"/>
+          <p:cNvPr id="25" name="TextBox 24"/>
           <p:cNvSpPr txBox="1"/>
           <p:nvPr/>
         </p:nvSpPr>
@@ -11362,7 +10375,7 @@
       </p:sp>
       <p:sp>
         <p:nvSpPr>
-          <p:cNvPr id="27" name="Oval 26"/>
+          <p:cNvPr id="26" name="Oval 25"/>
           <p:cNvSpPr/>
           <p:nvPr/>
         </p:nvSpPr>
@@ -11381,20 +10394,6 @@
             <a:noFill/>
           </a:ln>
         </p:spPr>
-        <p:style>
-          <a:lnRef idx="1">
-            <a:schemeClr val="accent1"/>
-          </a:lnRef>
-          <a:fillRef idx="3">
-            <a:schemeClr val="accent1"/>
-          </a:fillRef>
-          <a:effectRef idx="2">
-            <a:schemeClr val="accent1"/>
-          </a:effectRef>
-          <a:fontRef idx="minor">
-            <a:schemeClr val="lt1"/>
-          </a:fontRef>
-        </p:style>
         <p:txBody>
           <a:bodyPr rtlCol="0" anchor="ctr"/>
           <a:lstStyle/>
@@ -11405,7 +10404,7 @@
       </p:sp>
       <p:sp>
         <p:nvSpPr>
-          <p:cNvPr id="28" name="TextBox 27"/>
+          <p:cNvPr id="27" name="TextBox 26"/>
           <p:cNvSpPr txBox="1"/>
           <p:nvPr/>
         </p:nvSpPr>
@@ -11440,7 +10439,7 @@
       </p:sp>
       <p:sp>
         <p:nvSpPr>
-          <p:cNvPr id="29" name="TextBox 28"/>
+          <p:cNvPr id="28" name="TextBox 27"/>
           <p:cNvSpPr txBox="1"/>
           <p:nvPr/>
         </p:nvSpPr>
@@ -11475,7 +10474,7 @@
       </p:sp>
       <p:sp>
         <p:nvSpPr>
-          <p:cNvPr id="30" name="Oval 29"/>
+          <p:cNvPr id="29" name="Oval 28"/>
           <p:cNvSpPr/>
           <p:nvPr/>
         </p:nvSpPr>
@@ -11494,20 +10493,6 @@
             <a:noFill/>
           </a:ln>
         </p:spPr>
-        <p:style>
-          <a:lnRef idx="1">
-            <a:schemeClr val="accent1"/>
-          </a:lnRef>
-          <a:fillRef idx="3">
-            <a:schemeClr val="accent1"/>
-          </a:fillRef>
-          <a:effectRef idx="2">
-            <a:schemeClr val="accent1"/>
-          </a:effectRef>
-          <a:fontRef idx="minor">
-            <a:schemeClr val="lt1"/>
-          </a:fontRef>
-        </p:style>
         <p:txBody>
           <a:bodyPr rtlCol="0" anchor="ctr"/>
           <a:lstStyle/>
@@ -11518,7 +10503,7 @@
       </p:sp>
       <p:sp>
         <p:nvSpPr>
-          <p:cNvPr id="31" name="TextBox 30"/>
+          <p:cNvPr id="30" name="TextBox 29"/>
           <p:cNvSpPr txBox="1"/>
           <p:nvPr/>
         </p:nvSpPr>
@@ -11553,7 +10538,7 @@
       </p:sp>
       <p:sp>
         <p:nvSpPr>
-          <p:cNvPr id="32" name="TextBox 31"/>
+          <p:cNvPr id="31" name="TextBox 30"/>
           <p:cNvSpPr txBox="1"/>
           <p:nvPr/>
         </p:nvSpPr>
@@ -11588,7 +10573,7 @@
       </p:sp>
       <p:sp>
         <p:nvSpPr>
-          <p:cNvPr id="33" name="Oval 32"/>
+          <p:cNvPr id="32" name="Oval 31"/>
           <p:cNvSpPr/>
           <p:nvPr/>
         </p:nvSpPr>
@@ -11607,20 +10592,6 @@
             <a:noFill/>
           </a:ln>
         </p:spPr>
-        <p:style>
-          <a:lnRef idx="1">
-            <a:schemeClr val="accent1"/>
-          </a:lnRef>
-          <a:fillRef idx="3">
-            <a:schemeClr val="accent1"/>
-          </a:fillRef>
-          <a:effectRef idx="2">
-            <a:schemeClr val="accent1"/>
-          </a:effectRef>
-          <a:fontRef idx="minor">
-            <a:schemeClr val="lt1"/>
-          </a:fontRef>
-        </p:style>
         <p:txBody>
           <a:bodyPr rtlCol="0" anchor="ctr"/>
           <a:lstStyle/>
@@ -11631,7 +10602,7 @@
       </p:sp>
       <p:sp>
         <p:nvSpPr>
-          <p:cNvPr id="34" name="TextBox 33"/>
+          <p:cNvPr id="33" name="TextBox 32"/>
           <p:cNvSpPr txBox="1"/>
           <p:nvPr/>
         </p:nvSpPr>
@@ -11666,7 +10637,7 @@
       </p:sp>
       <p:sp>
         <p:nvSpPr>
-          <p:cNvPr id="35" name="TextBox 34"/>
+          <p:cNvPr id="34" name="TextBox 33"/>
           <p:cNvSpPr txBox="1"/>
           <p:nvPr/>
         </p:nvSpPr>
@@ -11701,7 +10672,7 @@
       </p:sp>
       <p:sp>
         <p:nvSpPr>
-          <p:cNvPr id="36" name="TextBox 35"/>
+          <p:cNvPr id="35" name="TextBox 34"/>
           <p:cNvSpPr txBox="1"/>
           <p:nvPr/>
         </p:nvSpPr>
@@ -11736,7 +10707,7 @@
       </p:sp>
       <p:sp>
         <p:nvSpPr>
-          <p:cNvPr id="37" name="TextBox 36"/>
+          <p:cNvPr id="36" name="TextBox 35"/>
           <p:cNvSpPr txBox="1"/>
           <p:nvPr/>
         </p:nvSpPr>
@@ -11780,6 +10751,14 @@
 <file path=ppt/slides/slide7.xml><?xml version="1.0" encoding="utf-8"?>
 <p:sld xmlns:a="http://schemas.openxmlformats.org/drawingml/2006/main" xmlns:p="http://schemas.openxmlformats.org/presentationml/2006/main" xmlns:r="http://schemas.openxmlformats.org/officeDocument/2006/relationships">
   <p:cSld>
+    <p:bg>
+      <p:bgPr>
+        <a:solidFill>
+          <a:srgbClr val="F6EEE2"/>
+        </a:solidFill>
+        <a:effectLst/>
+      </p:bgPr>
+    </p:bg>
     <p:spTree>
       <p:nvGrpSpPr>
         <p:cNvPr id="1" name=""/>
@@ -11795,49 +10774,6 @@
         </p:nvSpPr>
         <p:spPr>
           <a:xfrm>
-            <a:off x="0" y="0"/>
-            <a:ext cx="12191695" cy="6858000"/>
-          </a:xfrm>
-          <a:prstGeom prst="rect">
-            <a:avLst/>
-          </a:prstGeom>
-          <a:solidFill>
-            <a:srgbClr val="F6EEE2"/>
-          </a:solidFill>
-          <a:ln>
-            <a:noFill/>
-          </a:ln>
-        </p:spPr>
-        <p:style>
-          <a:lnRef idx="1">
-            <a:schemeClr val="accent1"/>
-          </a:lnRef>
-          <a:fillRef idx="3">
-            <a:schemeClr val="accent1"/>
-          </a:fillRef>
-          <a:effectRef idx="2">
-            <a:schemeClr val="accent1"/>
-          </a:effectRef>
-          <a:fontRef idx="minor">
-            <a:schemeClr val="lt1"/>
-          </a:fontRef>
-        </p:style>
-        <p:txBody>
-          <a:bodyPr rtlCol="0" anchor="ctr"/>
-          <a:lstStyle/>
-          <a:p>
-            <a:pPr algn="ctr"/>
-          </a:p>
-        </p:txBody>
-      </p:sp>
-      <p:sp>
-        <p:nvSpPr>
-          <p:cNvPr id="3" name="Rectangle 2"/>
-          <p:cNvSpPr/>
-          <p:nvPr/>
-        </p:nvSpPr>
-        <p:spPr>
-          <a:xfrm>
             <a:off x="548640" y="548640"/>
             <a:ext cx="548640" cy="73152"/>
           </a:xfrm>
@@ -11851,20 +10787,6 @@
             <a:noFill/>
           </a:ln>
         </p:spPr>
-        <p:style>
-          <a:lnRef idx="1">
-            <a:schemeClr val="accent1"/>
-          </a:lnRef>
-          <a:fillRef idx="3">
-            <a:schemeClr val="accent1"/>
-          </a:fillRef>
-          <a:effectRef idx="2">
-            <a:schemeClr val="accent1"/>
-          </a:effectRef>
-          <a:fontRef idx="minor">
-            <a:schemeClr val="lt1"/>
-          </a:fontRef>
-        </p:style>
         <p:txBody>
           <a:bodyPr rtlCol="0" anchor="ctr"/>
           <a:lstStyle/>
@@ -11875,7 +10797,7 @@
       </p:sp>
       <p:sp>
         <p:nvSpPr>
-          <p:cNvPr id="4" name="TextBox 3"/>
+          <p:cNvPr id="3" name="TextBox 2"/>
           <p:cNvSpPr txBox="1"/>
           <p:nvPr/>
         </p:nvSpPr>
@@ -11910,7 +10832,7 @@
       </p:sp>
       <p:sp>
         <p:nvSpPr>
-          <p:cNvPr id="5" name="TextBox 4"/>
+          <p:cNvPr id="4" name="TextBox 3"/>
           <p:cNvSpPr txBox="1"/>
           <p:nvPr/>
         </p:nvSpPr>
@@ -11945,7 +10867,7 @@
       </p:sp>
       <p:sp>
         <p:nvSpPr>
-          <p:cNvPr id="6" name="Rounded Rectangle 5"/>
+          <p:cNvPr id="5" name="Rounded Rectangle 4"/>
           <p:cNvSpPr/>
           <p:nvPr/>
         </p:nvSpPr>
@@ -11966,20 +10888,6 @@
             <a:noFill/>
           </a:ln>
         </p:spPr>
-        <p:style>
-          <a:lnRef idx="1">
-            <a:schemeClr val="accent1"/>
-          </a:lnRef>
-          <a:fillRef idx="3">
-            <a:schemeClr val="accent1"/>
-          </a:fillRef>
-          <a:effectRef idx="2">
-            <a:schemeClr val="accent1"/>
-          </a:effectRef>
-          <a:fontRef idx="minor">
-            <a:schemeClr val="lt1"/>
-          </a:fontRef>
-        </p:style>
         <p:txBody>
           <a:bodyPr rtlCol="0" anchor="ctr"/>
           <a:lstStyle/>
@@ -11990,7 +10898,7 @@
       </p:sp>
       <p:sp>
         <p:nvSpPr>
-          <p:cNvPr id="7" name="TextBox 6"/>
+          <p:cNvPr id="6" name="TextBox 5"/>
           <p:cNvSpPr txBox="1"/>
           <p:nvPr/>
         </p:nvSpPr>
@@ -12025,7 +10933,7 @@
       </p:sp>
       <p:sp>
         <p:nvSpPr>
-          <p:cNvPr id="8" name="TextBox 7"/>
+          <p:cNvPr id="7" name="TextBox 6"/>
           <p:cNvSpPr txBox="1"/>
           <p:nvPr/>
         </p:nvSpPr>
@@ -12060,7 +10968,7 @@
       </p:sp>
       <p:sp>
         <p:nvSpPr>
-          <p:cNvPr id="9" name="TextBox 8"/>
+          <p:cNvPr id="8" name="TextBox 7"/>
           <p:cNvSpPr txBox="1"/>
           <p:nvPr/>
         </p:nvSpPr>
@@ -12095,7 +11003,7 @@
       </p:sp>
       <p:sp>
         <p:nvSpPr>
-          <p:cNvPr id="10" name="Rounded Rectangle 9"/>
+          <p:cNvPr id="9" name="Rounded Rectangle 8"/>
           <p:cNvSpPr/>
           <p:nvPr/>
         </p:nvSpPr>
@@ -12116,20 +11024,6 @@
             <a:noFill/>
           </a:ln>
         </p:spPr>
-        <p:style>
-          <a:lnRef idx="1">
-            <a:schemeClr val="accent1"/>
-          </a:lnRef>
-          <a:fillRef idx="3">
-            <a:schemeClr val="accent1"/>
-          </a:fillRef>
-          <a:effectRef idx="2">
-            <a:schemeClr val="accent1"/>
-          </a:effectRef>
-          <a:fontRef idx="minor">
-            <a:schemeClr val="lt1"/>
-          </a:fontRef>
-        </p:style>
         <p:txBody>
           <a:bodyPr rtlCol="0" anchor="ctr"/>
           <a:lstStyle/>
@@ -12140,7 +11034,7 @@
       </p:sp>
       <p:sp>
         <p:nvSpPr>
-          <p:cNvPr id="11" name="TextBox 10"/>
+          <p:cNvPr id="10" name="TextBox 9"/>
           <p:cNvSpPr txBox="1"/>
           <p:nvPr/>
         </p:nvSpPr>
@@ -12175,7 +11069,7 @@
       </p:sp>
       <p:sp>
         <p:nvSpPr>
-          <p:cNvPr id="12" name="TextBox 11"/>
+          <p:cNvPr id="11" name="TextBox 10"/>
           <p:cNvSpPr txBox="1"/>
           <p:nvPr/>
         </p:nvSpPr>
@@ -12210,7 +11104,7 @@
       </p:sp>
       <p:sp>
         <p:nvSpPr>
-          <p:cNvPr id="13" name="TextBox 12"/>
+          <p:cNvPr id="12" name="TextBox 11"/>
           <p:cNvSpPr txBox="1"/>
           <p:nvPr/>
         </p:nvSpPr>
@@ -12245,7 +11139,7 @@
       </p:sp>
       <p:sp>
         <p:nvSpPr>
-          <p:cNvPr id="14" name="Rounded Rectangle 13"/>
+          <p:cNvPr id="13" name="Rounded Rectangle 12"/>
           <p:cNvSpPr/>
           <p:nvPr/>
         </p:nvSpPr>
@@ -12266,20 +11160,6 @@
             <a:noFill/>
           </a:ln>
         </p:spPr>
-        <p:style>
-          <a:lnRef idx="1">
-            <a:schemeClr val="accent1"/>
-          </a:lnRef>
-          <a:fillRef idx="3">
-            <a:schemeClr val="accent1"/>
-          </a:fillRef>
-          <a:effectRef idx="2">
-            <a:schemeClr val="accent1"/>
-          </a:effectRef>
-          <a:fontRef idx="minor">
-            <a:schemeClr val="lt1"/>
-          </a:fontRef>
-        </p:style>
         <p:txBody>
           <a:bodyPr rtlCol="0" anchor="ctr"/>
           <a:lstStyle/>
@@ -12290,7 +11170,7 @@
       </p:sp>
       <p:sp>
         <p:nvSpPr>
-          <p:cNvPr id="15" name="TextBox 14"/>
+          <p:cNvPr id="14" name="TextBox 13"/>
           <p:cNvSpPr txBox="1"/>
           <p:nvPr/>
         </p:nvSpPr>
@@ -12325,7 +11205,7 @@
       </p:sp>
       <p:sp>
         <p:nvSpPr>
-          <p:cNvPr id="16" name="TextBox 15"/>
+          <p:cNvPr id="15" name="TextBox 14"/>
           <p:cNvSpPr txBox="1"/>
           <p:nvPr/>
         </p:nvSpPr>
@@ -12372,7 +11252,7 @@
       </p:sp>
       <p:sp>
         <p:nvSpPr>
-          <p:cNvPr id="17" name="TextBox 16"/>
+          <p:cNvPr id="16" name="TextBox 15"/>
           <p:cNvSpPr txBox="1"/>
           <p:nvPr/>
         </p:nvSpPr>
@@ -12407,7 +11287,7 @@
       </p:sp>
       <p:sp>
         <p:nvSpPr>
-          <p:cNvPr id="18" name="Rounded Rectangle 17"/>
+          <p:cNvPr id="17" name="Rounded Rectangle 16"/>
           <p:cNvSpPr/>
           <p:nvPr/>
         </p:nvSpPr>
@@ -12428,20 +11308,6 @@
             <a:noFill/>
           </a:ln>
         </p:spPr>
-        <p:style>
-          <a:lnRef idx="1">
-            <a:schemeClr val="accent1"/>
-          </a:lnRef>
-          <a:fillRef idx="3">
-            <a:schemeClr val="accent1"/>
-          </a:fillRef>
-          <a:effectRef idx="2">
-            <a:schemeClr val="accent1"/>
-          </a:effectRef>
-          <a:fontRef idx="minor">
-            <a:schemeClr val="lt1"/>
-          </a:fontRef>
-        </p:style>
         <p:txBody>
           <a:bodyPr rtlCol="0" anchor="ctr"/>
           <a:lstStyle/>
@@ -12452,7 +11318,7 @@
       </p:sp>
       <p:sp>
         <p:nvSpPr>
-          <p:cNvPr id="19" name="TextBox 18"/>
+          <p:cNvPr id="18" name="TextBox 17"/>
           <p:cNvSpPr txBox="1"/>
           <p:nvPr/>
         </p:nvSpPr>
@@ -12487,7 +11353,7 @@
       </p:sp>
       <p:sp>
         <p:nvSpPr>
-          <p:cNvPr id="20" name="TextBox 19"/>
+          <p:cNvPr id="19" name="TextBox 18"/>
           <p:cNvSpPr txBox="1"/>
           <p:nvPr/>
         </p:nvSpPr>
@@ -12534,7 +11400,7 @@
       </p:sp>
       <p:sp>
         <p:nvSpPr>
-          <p:cNvPr id="21" name="TextBox 20"/>
+          <p:cNvPr id="20" name="TextBox 19"/>
           <p:cNvSpPr txBox="1"/>
           <p:nvPr/>
         </p:nvSpPr>
@@ -12569,7 +11435,7 @@
       </p:sp>
       <p:sp>
         <p:nvSpPr>
-          <p:cNvPr id="22" name="TextBox 21"/>
+          <p:cNvPr id="21" name="TextBox 20"/>
           <p:cNvSpPr txBox="1"/>
           <p:nvPr/>
         </p:nvSpPr>
@@ -12604,7 +11470,7 @@
       </p:sp>
       <p:sp>
         <p:nvSpPr>
-          <p:cNvPr id="23" name="TextBox 22"/>
+          <p:cNvPr id="22" name="TextBox 21"/>
           <p:cNvSpPr txBox="1"/>
           <p:nvPr/>
         </p:nvSpPr>
@@ -12648,6 +11514,14 @@
 <file path=ppt/slides/slide8.xml><?xml version="1.0" encoding="utf-8"?>
 <p:sld xmlns:a="http://schemas.openxmlformats.org/drawingml/2006/main" xmlns:p="http://schemas.openxmlformats.org/presentationml/2006/main" xmlns:r="http://schemas.openxmlformats.org/officeDocument/2006/relationships">
   <p:cSld>
+    <p:bg>
+      <p:bgPr>
+        <a:solidFill>
+          <a:srgbClr val="F6EEE2"/>
+        </a:solidFill>
+        <a:effectLst/>
+      </p:bgPr>
+    </p:bg>
     <p:spTree>
       <p:nvGrpSpPr>
         <p:cNvPr id="1" name=""/>
@@ -12663,49 +11537,6 @@
         </p:nvSpPr>
         <p:spPr>
           <a:xfrm>
-            <a:off x="0" y="0"/>
-            <a:ext cx="12191695" cy="6858000"/>
-          </a:xfrm>
-          <a:prstGeom prst="rect">
-            <a:avLst/>
-          </a:prstGeom>
-          <a:solidFill>
-            <a:srgbClr val="F6EEE2"/>
-          </a:solidFill>
-          <a:ln>
-            <a:noFill/>
-          </a:ln>
-        </p:spPr>
-        <p:style>
-          <a:lnRef idx="1">
-            <a:schemeClr val="accent1"/>
-          </a:lnRef>
-          <a:fillRef idx="3">
-            <a:schemeClr val="accent1"/>
-          </a:fillRef>
-          <a:effectRef idx="2">
-            <a:schemeClr val="accent1"/>
-          </a:effectRef>
-          <a:fontRef idx="minor">
-            <a:schemeClr val="lt1"/>
-          </a:fontRef>
-        </p:style>
-        <p:txBody>
-          <a:bodyPr rtlCol="0" anchor="ctr"/>
-          <a:lstStyle/>
-          <a:p>
-            <a:pPr algn="ctr"/>
-          </a:p>
-        </p:txBody>
-      </p:sp>
-      <p:sp>
-        <p:nvSpPr>
-          <p:cNvPr id="3" name="Rectangle 2"/>
-          <p:cNvSpPr/>
-          <p:nvPr/>
-        </p:nvSpPr>
-        <p:spPr>
-          <a:xfrm>
             <a:off x="548640" y="548640"/>
             <a:ext cx="548640" cy="73152"/>
           </a:xfrm>
@@ -12719,20 +11550,6 @@
             <a:noFill/>
           </a:ln>
         </p:spPr>
-        <p:style>
-          <a:lnRef idx="1">
-            <a:schemeClr val="accent1"/>
-          </a:lnRef>
-          <a:fillRef idx="3">
-            <a:schemeClr val="accent1"/>
-          </a:fillRef>
-          <a:effectRef idx="2">
-            <a:schemeClr val="accent1"/>
-          </a:effectRef>
-          <a:fontRef idx="minor">
-            <a:schemeClr val="lt1"/>
-          </a:fontRef>
-        </p:style>
         <p:txBody>
           <a:bodyPr rtlCol="0" anchor="ctr"/>
           <a:lstStyle/>
@@ -12743,7 +11560,7 @@
       </p:sp>
       <p:sp>
         <p:nvSpPr>
-          <p:cNvPr id="4" name="TextBox 3"/>
+          <p:cNvPr id="3" name="TextBox 2"/>
           <p:cNvSpPr txBox="1"/>
           <p:nvPr/>
         </p:nvSpPr>
@@ -12778,7 +11595,7 @@
       </p:sp>
       <p:sp>
         <p:nvSpPr>
-          <p:cNvPr id="5" name="TextBox 4"/>
+          <p:cNvPr id="4" name="TextBox 3"/>
           <p:cNvSpPr txBox="1"/>
           <p:nvPr/>
         </p:nvSpPr>
@@ -12813,7 +11630,7 @@
       </p:sp>
       <p:sp>
         <p:nvSpPr>
-          <p:cNvPr id="6" name="Rounded Rectangle 5"/>
+          <p:cNvPr id="5" name="Rounded Rectangle 4"/>
           <p:cNvSpPr/>
           <p:nvPr/>
         </p:nvSpPr>
@@ -12834,20 +11651,6 @@
             <a:noFill/>
           </a:ln>
         </p:spPr>
-        <p:style>
-          <a:lnRef idx="1">
-            <a:schemeClr val="accent1"/>
-          </a:lnRef>
-          <a:fillRef idx="3">
-            <a:schemeClr val="accent1"/>
-          </a:fillRef>
-          <a:effectRef idx="2">
-            <a:schemeClr val="accent1"/>
-          </a:effectRef>
-          <a:fontRef idx="minor">
-            <a:schemeClr val="lt1"/>
-          </a:fontRef>
-        </p:style>
         <p:txBody>
           <a:bodyPr rtlCol="0" anchor="ctr"/>
           <a:lstStyle/>
@@ -12858,7 +11661,7 @@
       </p:sp>
       <p:sp>
         <p:nvSpPr>
-          <p:cNvPr id="7" name="TextBox 6"/>
+          <p:cNvPr id="6" name="TextBox 5"/>
           <p:cNvSpPr txBox="1"/>
           <p:nvPr/>
         </p:nvSpPr>
@@ -12893,7 +11696,7 @@
       </p:sp>
       <p:sp>
         <p:nvSpPr>
-          <p:cNvPr id="8" name="TextBox 7"/>
+          <p:cNvPr id="7" name="TextBox 6"/>
           <p:cNvSpPr txBox="1"/>
           <p:nvPr/>
         </p:nvSpPr>
@@ -12928,7 +11731,7 @@
       </p:sp>
       <p:sp>
         <p:nvSpPr>
-          <p:cNvPr id="9" name="TextBox 8"/>
+          <p:cNvPr id="8" name="TextBox 7"/>
           <p:cNvSpPr txBox="1"/>
           <p:nvPr/>
         </p:nvSpPr>
@@ -12975,7 +11778,7 @@
       </p:sp>
       <p:sp>
         <p:nvSpPr>
-          <p:cNvPr id="10" name="Rounded Rectangle 9"/>
+          <p:cNvPr id="9" name="Rounded Rectangle 8"/>
           <p:cNvSpPr/>
           <p:nvPr/>
         </p:nvSpPr>
@@ -12996,20 +11799,6 @@
             <a:noFill/>
           </a:ln>
         </p:spPr>
-        <p:style>
-          <a:lnRef idx="1">
-            <a:schemeClr val="accent1"/>
-          </a:lnRef>
-          <a:fillRef idx="3">
-            <a:schemeClr val="accent1"/>
-          </a:fillRef>
-          <a:effectRef idx="2">
-            <a:schemeClr val="accent1"/>
-          </a:effectRef>
-          <a:fontRef idx="minor">
-            <a:schemeClr val="lt1"/>
-          </a:fontRef>
-        </p:style>
         <p:txBody>
           <a:bodyPr rtlCol="0" anchor="ctr"/>
           <a:lstStyle/>
@@ -13020,7 +11809,7 @@
       </p:sp>
       <p:sp>
         <p:nvSpPr>
-          <p:cNvPr id="11" name="TextBox 10"/>
+          <p:cNvPr id="10" name="TextBox 9"/>
           <p:cNvSpPr txBox="1"/>
           <p:nvPr/>
         </p:nvSpPr>
@@ -13055,7 +11844,7 @@
       </p:sp>
       <p:sp>
         <p:nvSpPr>
-          <p:cNvPr id="12" name="TextBox 11"/>
+          <p:cNvPr id="11" name="TextBox 10"/>
           <p:cNvSpPr txBox="1"/>
           <p:nvPr/>
         </p:nvSpPr>
@@ -13090,7 +11879,7 @@
       </p:sp>
       <p:sp>
         <p:nvSpPr>
-          <p:cNvPr id="13" name="TextBox 12"/>
+          <p:cNvPr id="12" name="TextBox 11"/>
           <p:cNvSpPr txBox="1"/>
           <p:nvPr/>
         </p:nvSpPr>
@@ -13137,7 +11926,7 @@
       </p:sp>
       <p:sp>
         <p:nvSpPr>
-          <p:cNvPr id="14" name="Rounded Rectangle 13"/>
+          <p:cNvPr id="13" name="Rounded Rectangle 12"/>
           <p:cNvSpPr/>
           <p:nvPr/>
         </p:nvSpPr>
@@ -13158,20 +11947,6 @@
             <a:noFill/>
           </a:ln>
         </p:spPr>
-        <p:style>
-          <a:lnRef idx="1">
-            <a:schemeClr val="accent1"/>
-          </a:lnRef>
-          <a:fillRef idx="3">
-            <a:schemeClr val="accent1"/>
-          </a:fillRef>
-          <a:effectRef idx="2">
-            <a:schemeClr val="accent1"/>
-          </a:effectRef>
-          <a:fontRef idx="minor">
-            <a:schemeClr val="lt1"/>
-          </a:fontRef>
-        </p:style>
         <p:txBody>
           <a:bodyPr rtlCol="0" anchor="ctr"/>
           <a:lstStyle/>
@@ -13182,7 +11957,7 @@
       </p:sp>
       <p:sp>
         <p:nvSpPr>
-          <p:cNvPr id="15" name="TextBox 14"/>
+          <p:cNvPr id="14" name="TextBox 13"/>
           <p:cNvSpPr txBox="1"/>
           <p:nvPr/>
         </p:nvSpPr>
@@ -13217,7 +11992,7 @@
       </p:sp>
       <p:sp>
         <p:nvSpPr>
-          <p:cNvPr id="16" name="TextBox 15"/>
+          <p:cNvPr id="15" name="TextBox 14"/>
           <p:cNvSpPr txBox="1"/>
           <p:nvPr/>
         </p:nvSpPr>
@@ -13252,7 +12027,7 @@
       </p:sp>
       <p:sp>
         <p:nvSpPr>
-          <p:cNvPr id="17" name="TextBox 16"/>
+          <p:cNvPr id="16" name="TextBox 15"/>
           <p:cNvSpPr txBox="1"/>
           <p:nvPr/>
         </p:nvSpPr>
@@ -13299,7 +12074,7 @@
       </p:sp>
       <p:sp>
         <p:nvSpPr>
-          <p:cNvPr id="18" name="Rounded Rectangle 17"/>
+          <p:cNvPr id="17" name="Rounded Rectangle 16"/>
           <p:cNvSpPr/>
           <p:nvPr/>
         </p:nvSpPr>
@@ -13320,20 +12095,6 @@
             <a:noFill/>
           </a:ln>
         </p:spPr>
-        <p:style>
-          <a:lnRef idx="1">
-            <a:schemeClr val="accent1"/>
-          </a:lnRef>
-          <a:fillRef idx="3">
-            <a:schemeClr val="accent1"/>
-          </a:fillRef>
-          <a:effectRef idx="2">
-            <a:schemeClr val="accent1"/>
-          </a:effectRef>
-          <a:fontRef idx="minor">
-            <a:schemeClr val="lt1"/>
-          </a:fontRef>
-        </p:style>
         <p:txBody>
           <a:bodyPr rtlCol="0" anchor="ctr"/>
           <a:lstStyle/>
@@ -13344,7 +12105,7 @@
       </p:sp>
       <p:sp>
         <p:nvSpPr>
-          <p:cNvPr id="19" name="TextBox 18"/>
+          <p:cNvPr id="18" name="TextBox 17"/>
           <p:cNvSpPr txBox="1"/>
           <p:nvPr/>
         </p:nvSpPr>
@@ -13379,7 +12140,7 @@
       </p:sp>
       <p:sp>
         <p:nvSpPr>
-          <p:cNvPr id="20" name="TextBox 19"/>
+          <p:cNvPr id="19" name="TextBox 18"/>
           <p:cNvSpPr txBox="1"/>
           <p:nvPr/>
         </p:nvSpPr>
@@ -13414,7 +12175,7 @@
       </p:sp>
       <p:sp>
         <p:nvSpPr>
-          <p:cNvPr id="21" name="TextBox 20"/>
+          <p:cNvPr id="20" name="TextBox 19"/>
           <p:cNvSpPr txBox="1"/>
           <p:nvPr/>
         </p:nvSpPr>
@@ -13461,7 +12222,7 @@
       </p:sp>
       <p:sp>
         <p:nvSpPr>
-          <p:cNvPr id="22" name="Rounded Rectangle 21"/>
+          <p:cNvPr id="21" name="Rounded Rectangle 20"/>
           <p:cNvSpPr/>
           <p:nvPr/>
         </p:nvSpPr>
@@ -13482,20 +12243,6 @@
             <a:noFill/>
           </a:ln>
         </p:spPr>
-        <p:style>
-          <a:lnRef idx="1">
-            <a:schemeClr val="accent1"/>
-          </a:lnRef>
-          <a:fillRef idx="3">
-            <a:schemeClr val="accent1"/>
-          </a:fillRef>
-          <a:effectRef idx="2">
-            <a:schemeClr val="accent1"/>
-          </a:effectRef>
-          <a:fontRef idx="minor">
-            <a:schemeClr val="lt1"/>
-          </a:fontRef>
-        </p:style>
         <p:txBody>
           <a:bodyPr rtlCol="0" anchor="ctr"/>
           <a:lstStyle/>
@@ -13506,7 +12253,7 @@
       </p:sp>
       <p:sp>
         <p:nvSpPr>
-          <p:cNvPr id="23" name="TextBox 22"/>
+          <p:cNvPr id="22" name="TextBox 21"/>
           <p:cNvSpPr txBox="1"/>
           <p:nvPr/>
         </p:nvSpPr>
@@ -13541,7 +12288,7 @@
       </p:sp>
       <p:sp>
         <p:nvSpPr>
-          <p:cNvPr id="24" name="TextBox 23"/>
+          <p:cNvPr id="23" name="TextBox 22"/>
           <p:cNvSpPr txBox="1"/>
           <p:nvPr/>
         </p:nvSpPr>
@@ -13576,7 +12323,7 @@
       </p:sp>
       <p:sp>
         <p:nvSpPr>
-          <p:cNvPr id="25" name="TextBox 24"/>
+          <p:cNvPr id="24" name="TextBox 23"/>
           <p:cNvSpPr txBox="1"/>
           <p:nvPr/>
         </p:nvSpPr>
@@ -13623,7 +12370,7 @@
       </p:sp>
       <p:sp>
         <p:nvSpPr>
-          <p:cNvPr id="26" name="TextBox 25"/>
+          <p:cNvPr id="25" name="TextBox 24"/>
           <p:cNvSpPr txBox="1"/>
           <p:nvPr/>
         </p:nvSpPr>
@@ -13658,7 +12405,7 @@
       </p:sp>
       <p:sp>
         <p:nvSpPr>
-          <p:cNvPr id="27" name="TextBox 26"/>
+          <p:cNvPr id="26" name="TextBox 25"/>
           <p:cNvSpPr txBox="1"/>
           <p:nvPr/>
         </p:nvSpPr>
@@ -13702,6 +12449,14 @@
 <file path=ppt/slides/slide9.xml><?xml version="1.0" encoding="utf-8"?>
 <p:sld xmlns:a="http://schemas.openxmlformats.org/drawingml/2006/main" xmlns:p="http://schemas.openxmlformats.org/presentationml/2006/main" xmlns:r="http://schemas.openxmlformats.org/officeDocument/2006/relationships">
   <p:cSld>
+    <p:bg>
+      <p:bgPr>
+        <a:solidFill>
+          <a:srgbClr val="F6EEE2"/>
+        </a:solidFill>
+        <a:effectLst/>
+      </p:bgPr>
+    </p:bg>
     <p:spTree>
       <p:nvGrpSpPr>
         <p:cNvPr id="1" name=""/>
@@ -13717,49 +12472,6 @@
         </p:nvSpPr>
         <p:spPr>
           <a:xfrm>
-            <a:off x="0" y="0"/>
-            <a:ext cx="12191695" cy="6858000"/>
-          </a:xfrm>
-          <a:prstGeom prst="rect">
-            <a:avLst/>
-          </a:prstGeom>
-          <a:solidFill>
-            <a:srgbClr val="F6EEE2"/>
-          </a:solidFill>
-          <a:ln>
-            <a:noFill/>
-          </a:ln>
-        </p:spPr>
-        <p:style>
-          <a:lnRef idx="1">
-            <a:schemeClr val="accent1"/>
-          </a:lnRef>
-          <a:fillRef idx="3">
-            <a:schemeClr val="accent1"/>
-          </a:fillRef>
-          <a:effectRef idx="2">
-            <a:schemeClr val="accent1"/>
-          </a:effectRef>
-          <a:fontRef idx="minor">
-            <a:schemeClr val="lt1"/>
-          </a:fontRef>
-        </p:style>
-        <p:txBody>
-          <a:bodyPr rtlCol="0" anchor="ctr"/>
-          <a:lstStyle/>
-          <a:p>
-            <a:pPr algn="ctr"/>
-          </a:p>
-        </p:txBody>
-      </p:sp>
-      <p:sp>
-        <p:nvSpPr>
-          <p:cNvPr id="3" name="Rectangle 2"/>
-          <p:cNvSpPr/>
-          <p:nvPr/>
-        </p:nvSpPr>
-        <p:spPr>
-          <a:xfrm>
             <a:off x="548640" y="548640"/>
             <a:ext cx="548640" cy="73152"/>
           </a:xfrm>
@@ -13773,20 +12485,6 @@
             <a:noFill/>
           </a:ln>
         </p:spPr>
-        <p:style>
-          <a:lnRef idx="1">
-            <a:schemeClr val="accent1"/>
-          </a:lnRef>
-          <a:fillRef idx="3">
-            <a:schemeClr val="accent1"/>
-          </a:fillRef>
-          <a:effectRef idx="2">
-            <a:schemeClr val="accent1"/>
-          </a:effectRef>
-          <a:fontRef idx="minor">
-            <a:schemeClr val="lt1"/>
-          </a:fontRef>
-        </p:style>
         <p:txBody>
           <a:bodyPr rtlCol="0" anchor="ctr"/>
           <a:lstStyle/>
@@ -13797,7 +12495,7 @@
       </p:sp>
       <p:sp>
         <p:nvSpPr>
-          <p:cNvPr id="4" name="TextBox 3"/>
+          <p:cNvPr id="3" name="TextBox 2"/>
           <p:cNvSpPr txBox="1"/>
           <p:nvPr/>
         </p:nvSpPr>
@@ -13832,7 +12530,7 @@
       </p:sp>
       <p:sp>
         <p:nvSpPr>
-          <p:cNvPr id="5" name="TextBox 4"/>
+          <p:cNvPr id="4" name="TextBox 3"/>
           <p:cNvSpPr txBox="1"/>
           <p:nvPr/>
         </p:nvSpPr>
@@ -13867,7 +12565,7 @@
       </p:sp>
       <p:sp>
         <p:nvSpPr>
-          <p:cNvPr id="6" name="Oval 5"/>
+          <p:cNvPr id="5" name="Oval 4"/>
           <p:cNvSpPr/>
           <p:nvPr/>
         </p:nvSpPr>
@@ -13886,20 +12584,6 @@
             <a:noFill/>
           </a:ln>
         </p:spPr>
-        <p:style>
-          <a:lnRef idx="1">
-            <a:schemeClr val="accent1"/>
-          </a:lnRef>
-          <a:fillRef idx="3">
-            <a:schemeClr val="accent1"/>
-          </a:fillRef>
-          <a:effectRef idx="2">
-            <a:schemeClr val="accent1"/>
-          </a:effectRef>
-          <a:fontRef idx="minor">
-            <a:schemeClr val="lt1"/>
-          </a:fontRef>
-        </p:style>
         <p:txBody>
           <a:bodyPr rtlCol="0" anchor="ctr"/>
           <a:lstStyle/>
@@ -13910,7 +12594,7 @@
       </p:sp>
       <p:sp>
         <p:nvSpPr>
-          <p:cNvPr id="7" name="TextBox 6"/>
+          <p:cNvPr id="6" name="TextBox 5"/>
           <p:cNvSpPr txBox="1"/>
           <p:nvPr/>
         </p:nvSpPr>
@@ -13945,7 +12629,7 @@
       </p:sp>
       <p:sp>
         <p:nvSpPr>
-          <p:cNvPr id="8" name="TextBox 7"/>
+          <p:cNvPr id="7" name="TextBox 6"/>
           <p:cNvSpPr txBox="1"/>
           <p:nvPr/>
         </p:nvSpPr>
@@ -13980,7 +12664,7 @@
       </p:sp>
       <p:sp>
         <p:nvSpPr>
-          <p:cNvPr id="9" name="TextBox 8"/>
+          <p:cNvPr id="8" name="TextBox 7"/>
           <p:cNvSpPr txBox="1"/>
           <p:nvPr/>
         </p:nvSpPr>
@@ -14015,7 +12699,7 @@
       </p:sp>
       <p:sp>
         <p:nvSpPr>
-          <p:cNvPr id="10" name="Oval 9"/>
+          <p:cNvPr id="9" name="Oval 8"/>
           <p:cNvSpPr/>
           <p:nvPr/>
         </p:nvSpPr>
@@ -14034,20 +12718,6 @@
             <a:noFill/>
           </a:ln>
         </p:spPr>
-        <p:style>
-          <a:lnRef idx="1">
-            <a:schemeClr val="accent1"/>
-          </a:lnRef>
-          <a:fillRef idx="3">
-            <a:schemeClr val="accent1"/>
-          </a:fillRef>
-          <a:effectRef idx="2">
-            <a:schemeClr val="accent1"/>
-          </a:effectRef>
-          <a:fontRef idx="minor">
-            <a:schemeClr val="lt1"/>
-          </a:fontRef>
-        </p:style>
         <p:txBody>
           <a:bodyPr rtlCol="0" anchor="ctr"/>
           <a:lstStyle/>
@@ -14058,7 +12728,7 @@
       </p:sp>
       <p:sp>
         <p:nvSpPr>
-          <p:cNvPr id="11" name="TextBox 10"/>
+          <p:cNvPr id="10" name="TextBox 9"/>
           <p:cNvSpPr txBox="1"/>
           <p:nvPr/>
         </p:nvSpPr>
@@ -14093,7 +12763,7 @@
       </p:sp>
       <p:sp>
         <p:nvSpPr>
-          <p:cNvPr id="12" name="TextBox 11"/>
+          <p:cNvPr id="11" name="TextBox 10"/>
           <p:cNvSpPr txBox="1"/>
           <p:nvPr/>
         </p:nvSpPr>
@@ -14128,7 +12798,7 @@
       </p:sp>
       <p:sp>
         <p:nvSpPr>
-          <p:cNvPr id="13" name="TextBox 12"/>
+          <p:cNvPr id="12" name="TextBox 11"/>
           <p:cNvSpPr txBox="1"/>
           <p:nvPr/>
         </p:nvSpPr>
@@ -14163,7 +12833,7 @@
       </p:sp>
       <p:sp>
         <p:nvSpPr>
-          <p:cNvPr id="14" name="Oval 13"/>
+          <p:cNvPr id="13" name="Oval 12"/>
           <p:cNvSpPr/>
           <p:nvPr/>
         </p:nvSpPr>
@@ -14182,20 +12852,6 @@
             <a:noFill/>
           </a:ln>
         </p:spPr>
-        <p:style>
-          <a:lnRef idx="1">
-            <a:schemeClr val="accent1"/>
-          </a:lnRef>
-          <a:fillRef idx="3">
-            <a:schemeClr val="accent1"/>
-          </a:fillRef>
-          <a:effectRef idx="2">
-            <a:schemeClr val="accent1"/>
-          </a:effectRef>
-          <a:fontRef idx="minor">
-            <a:schemeClr val="lt1"/>
-          </a:fontRef>
-        </p:style>
         <p:txBody>
           <a:bodyPr rtlCol="0" anchor="ctr"/>
           <a:lstStyle/>
@@ -14206,7 +12862,7 @@
       </p:sp>
       <p:sp>
         <p:nvSpPr>
-          <p:cNvPr id="15" name="TextBox 14"/>
+          <p:cNvPr id="14" name="TextBox 13"/>
           <p:cNvSpPr txBox="1"/>
           <p:nvPr/>
         </p:nvSpPr>
@@ -14241,7 +12897,7 @@
       </p:sp>
       <p:sp>
         <p:nvSpPr>
-          <p:cNvPr id="16" name="TextBox 15"/>
+          <p:cNvPr id="15" name="TextBox 14"/>
           <p:cNvSpPr txBox="1"/>
           <p:nvPr/>
         </p:nvSpPr>
@@ -14276,7 +12932,7 @@
       </p:sp>
       <p:sp>
         <p:nvSpPr>
-          <p:cNvPr id="17" name="TextBox 16"/>
+          <p:cNvPr id="16" name="TextBox 15"/>
           <p:cNvSpPr txBox="1"/>
           <p:nvPr/>
         </p:nvSpPr>
@@ -14311,7 +12967,7 @@
       </p:sp>
       <p:sp>
         <p:nvSpPr>
-          <p:cNvPr id="18" name="Oval 17"/>
+          <p:cNvPr id="17" name="Oval 16"/>
           <p:cNvSpPr/>
           <p:nvPr/>
         </p:nvSpPr>
@@ -14330,20 +12986,6 @@
             <a:noFill/>
           </a:ln>
         </p:spPr>
-        <p:style>
-          <a:lnRef idx="1">
-            <a:schemeClr val="accent1"/>
-          </a:lnRef>
-          <a:fillRef idx="3">
-            <a:schemeClr val="accent1"/>
-          </a:fillRef>
-          <a:effectRef idx="2">
-            <a:schemeClr val="accent1"/>
-          </a:effectRef>
-          <a:fontRef idx="minor">
-            <a:schemeClr val="lt1"/>
-          </a:fontRef>
-        </p:style>
         <p:txBody>
           <a:bodyPr rtlCol="0" anchor="ctr"/>
           <a:lstStyle/>
@@ -14354,7 +12996,7 @@
       </p:sp>
       <p:sp>
         <p:nvSpPr>
-          <p:cNvPr id="19" name="TextBox 18"/>
+          <p:cNvPr id="18" name="TextBox 17"/>
           <p:cNvSpPr txBox="1"/>
           <p:nvPr/>
         </p:nvSpPr>
@@ -14389,7 +13031,7 @@
       </p:sp>
       <p:sp>
         <p:nvSpPr>
-          <p:cNvPr id="20" name="TextBox 19"/>
+          <p:cNvPr id="19" name="TextBox 18"/>
           <p:cNvSpPr txBox="1"/>
           <p:nvPr/>
         </p:nvSpPr>
@@ -14424,7 +13066,7 @@
       </p:sp>
       <p:sp>
         <p:nvSpPr>
-          <p:cNvPr id="21" name="TextBox 20"/>
+          <p:cNvPr id="20" name="TextBox 19"/>
           <p:cNvSpPr txBox="1"/>
           <p:nvPr/>
         </p:nvSpPr>
@@ -14459,7 +13101,7 @@
       </p:sp>
       <p:sp>
         <p:nvSpPr>
-          <p:cNvPr id="22" name="Oval 21"/>
+          <p:cNvPr id="21" name="Oval 20"/>
           <p:cNvSpPr/>
           <p:nvPr/>
         </p:nvSpPr>
@@ -14478,20 +13120,6 @@
             <a:noFill/>
           </a:ln>
         </p:spPr>
-        <p:style>
-          <a:lnRef idx="1">
-            <a:schemeClr val="accent1"/>
-          </a:lnRef>
-          <a:fillRef idx="3">
-            <a:schemeClr val="accent1"/>
-          </a:fillRef>
-          <a:effectRef idx="2">
-            <a:schemeClr val="accent1"/>
-          </a:effectRef>
-          <a:fontRef idx="minor">
-            <a:schemeClr val="lt1"/>
-          </a:fontRef>
-        </p:style>
         <p:txBody>
           <a:bodyPr rtlCol="0" anchor="ctr"/>
           <a:lstStyle/>
@@ -14502,7 +13130,7 @@
       </p:sp>
       <p:sp>
         <p:nvSpPr>
-          <p:cNvPr id="23" name="TextBox 22"/>
+          <p:cNvPr id="22" name="TextBox 21"/>
           <p:cNvSpPr txBox="1"/>
           <p:nvPr/>
         </p:nvSpPr>
@@ -14537,7 +13165,7 @@
       </p:sp>
       <p:sp>
         <p:nvSpPr>
-          <p:cNvPr id="24" name="TextBox 23"/>
+          <p:cNvPr id="23" name="TextBox 22"/>
           <p:cNvSpPr txBox="1"/>
           <p:nvPr/>
         </p:nvSpPr>
@@ -14572,7 +13200,7 @@
       </p:sp>
       <p:sp>
         <p:nvSpPr>
-          <p:cNvPr id="25" name="TextBox 24"/>
+          <p:cNvPr id="24" name="TextBox 23"/>
           <p:cNvSpPr txBox="1"/>
           <p:nvPr/>
         </p:nvSpPr>
@@ -14607,7 +13235,7 @@
       </p:sp>
       <p:sp>
         <p:nvSpPr>
-          <p:cNvPr id="26" name="Oval 25"/>
+          <p:cNvPr id="25" name="Oval 24"/>
           <p:cNvSpPr/>
           <p:nvPr/>
         </p:nvSpPr>
@@ -14626,20 +13254,6 @@
             <a:noFill/>
           </a:ln>
         </p:spPr>
-        <p:style>
-          <a:lnRef idx="1">
-            <a:schemeClr val="accent1"/>
-          </a:lnRef>
-          <a:fillRef idx="3">
-            <a:schemeClr val="accent1"/>
-          </a:fillRef>
-          <a:effectRef idx="2">
-            <a:schemeClr val="accent1"/>
-          </a:effectRef>
-          <a:fontRef idx="minor">
-            <a:schemeClr val="lt1"/>
-          </a:fontRef>
-        </p:style>
         <p:txBody>
           <a:bodyPr rtlCol="0" anchor="ctr"/>
           <a:lstStyle/>
@@ -14650,7 +13264,7 @@
       </p:sp>
       <p:sp>
         <p:nvSpPr>
-          <p:cNvPr id="27" name="TextBox 26"/>
+          <p:cNvPr id="26" name="TextBox 25"/>
           <p:cNvSpPr txBox="1"/>
           <p:nvPr/>
         </p:nvSpPr>
@@ -14685,7 +13299,7 @@
       </p:sp>
       <p:sp>
         <p:nvSpPr>
-          <p:cNvPr id="28" name="TextBox 27"/>
+          <p:cNvPr id="27" name="TextBox 26"/>
           <p:cNvSpPr txBox="1"/>
           <p:nvPr/>
         </p:nvSpPr>
@@ -14720,7 +13334,7 @@
       </p:sp>
       <p:sp>
         <p:nvSpPr>
-          <p:cNvPr id="29" name="TextBox 28"/>
+          <p:cNvPr id="28" name="TextBox 27"/>
           <p:cNvSpPr txBox="1"/>
           <p:nvPr/>
         </p:nvSpPr>
@@ -14755,7 +13369,7 @@
       </p:sp>
       <p:sp>
         <p:nvSpPr>
-          <p:cNvPr id="30" name="Oval 29"/>
+          <p:cNvPr id="29" name="Oval 28"/>
           <p:cNvSpPr/>
           <p:nvPr/>
         </p:nvSpPr>
@@ -14774,20 +13388,6 @@
             <a:noFill/>
           </a:ln>
         </p:spPr>
-        <p:style>
-          <a:lnRef idx="1">
-            <a:schemeClr val="accent1"/>
-          </a:lnRef>
-          <a:fillRef idx="3">
-            <a:schemeClr val="accent1"/>
-          </a:fillRef>
-          <a:effectRef idx="2">
-            <a:schemeClr val="accent1"/>
-          </a:effectRef>
-          <a:fontRef idx="minor">
-            <a:schemeClr val="lt1"/>
-          </a:fontRef>
-        </p:style>
         <p:txBody>
           <a:bodyPr rtlCol="0" anchor="ctr"/>
           <a:lstStyle/>
@@ -14798,7 +13398,7 @@
       </p:sp>
       <p:sp>
         <p:nvSpPr>
-          <p:cNvPr id="31" name="TextBox 30"/>
+          <p:cNvPr id="30" name="TextBox 29"/>
           <p:cNvSpPr txBox="1"/>
           <p:nvPr/>
         </p:nvSpPr>
@@ -14833,7 +13433,7 @@
       </p:sp>
       <p:sp>
         <p:nvSpPr>
-          <p:cNvPr id="32" name="TextBox 31"/>
+          <p:cNvPr id="31" name="TextBox 30"/>
           <p:cNvSpPr txBox="1"/>
           <p:nvPr/>
         </p:nvSpPr>
@@ -14868,7 +13468,7 @@
       </p:sp>
       <p:sp>
         <p:nvSpPr>
-          <p:cNvPr id="33" name="TextBox 32"/>
+          <p:cNvPr id="32" name="TextBox 31"/>
           <p:cNvSpPr txBox="1"/>
           <p:nvPr/>
         </p:nvSpPr>
@@ -14903,7 +13503,7 @@
       </p:sp>
       <p:sp>
         <p:nvSpPr>
-          <p:cNvPr id="34" name="Oval 33"/>
+          <p:cNvPr id="33" name="Oval 32"/>
           <p:cNvSpPr/>
           <p:nvPr/>
         </p:nvSpPr>
@@ -14922,20 +13522,6 @@
             <a:noFill/>
           </a:ln>
         </p:spPr>
-        <p:style>
-          <a:lnRef idx="1">
-            <a:schemeClr val="accent1"/>
-          </a:lnRef>
-          <a:fillRef idx="3">
-            <a:schemeClr val="accent1"/>
-          </a:fillRef>
-          <a:effectRef idx="2">
-            <a:schemeClr val="accent1"/>
-          </a:effectRef>
-          <a:fontRef idx="minor">
-            <a:schemeClr val="lt1"/>
-          </a:fontRef>
-        </p:style>
         <p:txBody>
           <a:bodyPr rtlCol="0" anchor="ctr"/>
           <a:lstStyle/>
@@ -14946,7 +13532,7 @@
       </p:sp>
       <p:sp>
         <p:nvSpPr>
-          <p:cNvPr id="35" name="TextBox 34"/>
+          <p:cNvPr id="34" name="TextBox 33"/>
           <p:cNvSpPr txBox="1"/>
           <p:nvPr/>
         </p:nvSpPr>
@@ -14981,7 +13567,7 @@
       </p:sp>
       <p:sp>
         <p:nvSpPr>
-          <p:cNvPr id="36" name="TextBox 35"/>
+          <p:cNvPr id="35" name="TextBox 34"/>
           <p:cNvSpPr txBox="1"/>
           <p:nvPr/>
         </p:nvSpPr>
@@ -15016,7 +13602,7 @@
       </p:sp>
       <p:sp>
         <p:nvSpPr>
-          <p:cNvPr id="37" name="TextBox 36"/>
+          <p:cNvPr id="36" name="TextBox 35"/>
           <p:cNvSpPr txBox="1"/>
           <p:nvPr/>
         </p:nvSpPr>
@@ -15051,7 +13637,7 @@
       </p:sp>
       <p:sp>
         <p:nvSpPr>
-          <p:cNvPr id="38" name="TextBox 37"/>
+          <p:cNvPr id="37" name="TextBox 36"/>
           <p:cNvSpPr txBox="1"/>
           <p:nvPr/>
         </p:nvSpPr>
@@ -15086,7 +13672,7 @@
       </p:sp>
       <p:sp>
         <p:nvSpPr>
-          <p:cNvPr id="39" name="TextBox 38"/>
+          <p:cNvPr id="38" name="TextBox 37"/>
           <p:cNvSpPr txBox="1"/>
           <p:nvPr/>
         </p:nvSpPr>
